--- a/mahjong-slides/博太の麻雀再生工場2_副露編.pptx
+++ b/mahjong-slides/博太の麻雀再生工場2_副露編.pptx
@@ -3101,7 +3101,7 @@
     <p:bg>
       <p:bgPr>
         <a:solidFill>
-          <a:srgbClr val="0F2B23"/>
+          <a:srgbClr val="F5F1E6"/>
         </a:solidFill>
         <a:effectLst/>
       </p:bgPr>
@@ -3128,7 +3128,7 @@
             <a:avLst/>
           </a:prstGeom>
           <a:solidFill>
-            <a:srgbClr val="EE5A3C"/>
+            <a:srgbClr val="C23B1E"/>
           </a:solidFill>
           <a:ln>
             <a:noFill/>
@@ -3190,7 +3190,7 @@
             <a:r>
               <a:rPr sz="2200" b="1">
                 <a:solidFill>
-                  <a:srgbClr val="A7BCB1"/>
+                  <a:srgbClr val="4E5F57"/>
                 </a:solidFill>
                 <a:latin typeface="Zen Kaku Gothic New"/>
                 <a:ea typeface="Zen Kaku Gothic New"/>
@@ -3234,7 +3234,7 @@
             <a:r>
               <a:rPr sz="11800" b="0">
                 <a:solidFill>
-                  <a:srgbClr val="F3EEE1"/>
+                  <a:srgbClr val="1B2A24"/>
                 </a:solidFill>
                 <a:latin typeface="Dela Gothic One"/>
                 <a:ea typeface="Dela Gothic One"/>
@@ -3245,7 +3245,7 @@
             <a:r>
               <a:rPr sz="11800" b="0">
                 <a:solidFill>
-                  <a:srgbClr val="F3EEE1"/>
+                  <a:srgbClr val="1B2A24"/>
                 </a:solidFill>
                 <a:latin typeface="Dela Gothic One"/>
                 <a:ea typeface="Dela Gothic One"/>
@@ -3289,7 +3289,7 @@
             <a:r>
               <a:rPr sz="15000" b="0">
                 <a:solidFill>
-                  <a:srgbClr val="EE5A3C"/>
+                  <a:srgbClr val="C23B1E"/>
                 </a:solidFill>
                 <a:latin typeface="Dela Gothic One"/>
                 <a:ea typeface="Dela Gothic One"/>
@@ -3315,11 +3315,11 @@
             <a:avLst/>
           </a:prstGeom>
           <a:solidFill>
-            <a:srgbClr val="0F2B23"/>
+            <a:srgbClr val="F5F1E6"/>
           </a:solidFill>
           <a:ln w="50800">
             <a:solidFill>
-              <a:srgbClr val="EE5A3C"/>
+              <a:srgbClr val="C23B1E"/>
             </a:solidFill>
           </a:ln>
           <a:effectLst/>
@@ -3379,7 +3379,7 @@
             <a:r>
               <a:rPr sz="5200" b="0">
                 <a:solidFill>
-                  <a:srgbClr val="EE5A3C"/>
+                  <a:srgbClr val="C23B1E"/>
                 </a:solidFill>
                 <a:latin typeface="Dela Gothic One"/>
                 <a:ea typeface="Dela Gothic One"/>
@@ -3423,7 +3423,7 @@
             <a:r>
               <a:rPr sz="1400" b="1">
                 <a:solidFill>
-                  <a:srgbClr val="A7BCB1"/>
+                  <a:srgbClr val="4E5F57"/>
                 </a:solidFill>
                 <a:latin typeface="Zen Kaku Gothic New"/>
                 <a:ea typeface="Zen Kaku Gothic New"/>
@@ -3451,11 +3451,11 @@
             </a:avLst>
           </a:prstGeom>
           <a:solidFill>
-            <a:srgbClr val="F6F1E4"/>
+            <a:srgbClr val="FFFFFF"/>
           </a:solidFill>
           <a:ln w="12700">
             <a:solidFill>
-              <a:srgbClr val="C9BFA6"/>
+              <a:srgbClr val="B8AE94"/>
             </a:solidFill>
           </a:ln>
           <a:effectLst/>
@@ -3587,11 +3587,11 @@
             </a:avLst>
           </a:prstGeom>
           <a:solidFill>
-            <a:srgbClr val="F6F1E4"/>
+            <a:srgbClr val="FFFFFF"/>
           </a:solidFill>
           <a:ln w="12700">
             <a:solidFill>
-              <a:srgbClr val="C9BFA6"/>
+              <a:srgbClr val="B8AE94"/>
             </a:solidFill>
           </a:ln>
           <a:effectLst/>
@@ -3723,11 +3723,11 @@
             </a:avLst>
           </a:prstGeom>
           <a:solidFill>
-            <a:srgbClr val="F6F1E4"/>
+            <a:srgbClr val="FFFFFF"/>
           </a:solidFill>
           <a:ln w="12700">
             <a:solidFill>
-              <a:srgbClr val="C9BFA6"/>
+              <a:srgbClr val="B8AE94"/>
             </a:solidFill>
           </a:ln>
           <a:effectLst/>
@@ -3859,11 +3859,11 @@
             </a:avLst>
           </a:prstGeom>
           <a:solidFill>
-            <a:srgbClr val="F6F1E4"/>
+            <a:srgbClr val="FFFFFF"/>
           </a:solidFill>
           <a:ln w="12700">
             <a:solidFill>
-              <a:srgbClr val="C9BFA6"/>
+              <a:srgbClr val="B8AE94"/>
             </a:solidFill>
           </a:ln>
           <a:effectLst/>
@@ -3995,11 +3995,11 @@
             </a:avLst>
           </a:prstGeom>
           <a:solidFill>
-            <a:srgbClr val="F6F1E4"/>
+            <a:srgbClr val="FFFFFF"/>
           </a:solidFill>
           <a:ln w="12700">
             <a:solidFill>
-              <a:srgbClr val="C9BFA6"/>
+              <a:srgbClr val="B8AE94"/>
             </a:solidFill>
           </a:ln>
           <a:effectLst/>
@@ -4103,7 +4103,7 @@
             <a:r>
               <a:rPr sz="2600" b="0">
                 <a:solidFill>
-                  <a:srgbClr val="EE5A3C"/>
+                  <a:srgbClr val="C23B1E"/>
                 </a:solidFill>
                 <a:latin typeface="Dela Gothic One"/>
                 <a:ea typeface="Dela Gothic One"/>
@@ -4128,7 +4128,7 @@
     <p:bg>
       <p:bgPr>
         <a:solidFill>
-          <a:srgbClr val="0F2B23"/>
+          <a:srgbClr val="F5F1E6"/>
         </a:solidFill>
         <a:effectLst/>
       </p:bgPr>
@@ -4173,7 +4173,7 @@
             <a:r>
               <a:rPr sz="1800" b="1">
                 <a:solidFill>
-                  <a:srgbClr val="A7BCB1"/>
+                  <a:srgbClr val="4E5F57"/>
                 </a:solidFill>
                 <a:latin typeface="Zen Kaku Gothic New"/>
                 <a:ea typeface="Zen Kaku Gothic New"/>
@@ -4184,7 +4184,7 @@
             <a:r>
               <a:rPr sz="4400" b="0">
                 <a:solidFill>
-                  <a:srgbClr val="EE5A3C"/>
+                  <a:srgbClr val="C23B1E"/>
                 </a:solidFill>
                 <a:latin typeface="Dela Gothic One"/>
                 <a:ea typeface="Dela Gothic One"/>
@@ -4228,7 +4228,7 @@
             <a:r>
               <a:rPr sz="3400" b="0">
                 <a:solidFill>
-                  <a:srgbClr val="F3EEE1"/>
+                  <a:srgbClr val="1B2A24"/>
                 </a:solidFill>
                 <a:latin typeface="Dela Gothic One"/>
                 <a:ea typeface="Dela Gothic One"/>
@@ -4272,7 +4272,7 @@
             <a:r>
               <a:rPr sz="960" b="0">
                 <a:solidFill>
-                  <a:srgbClr val="EE5A3C"/>
+                  <a:srgbClr val="C23B1E"/>
                 </a:solidFill>
                 <a:latin typeface="Zen Kaku Gothic New"/>
                 <a:ea typeface="Zen Kaku Gothic New"/>
@@ -4283,7 +4283,7 @@
             <a:r>
               <a:rPr sz="1600" b="0">
                 <a:solidFill>
-                  <a:srgbClr val="F3EEE1"/>
+                  <a:srgbClr val="1B2A24"/>
                 </a:solidFill>
                 <a:latin typeface="Zen Kaku Gothic New"/>
                 <a:ea typeface="Zen Kaku Gothic New"/>
@@ -4294,7 +4294,7 @@
             <a:r>
               <a:rPr sz="1600" b="1">
                 <a:solidFill>
-                  <a:srgbClr val="EE5A3C"/>
+                  <a:srgbClr val="C23B1E"/>
                 </a:solidFill>
                 <a:latin typeface="Zen Kaku Gothic New"/>
                 <a:ea typeface="Zen Kaku Gothic New"/>
@@ -4315,7 +4315,7 @@
             <a:r>
               <a:rPr sz="960" b="0">
                 <a:solidFill>
-                  <a:srgbClr val="EE5A3C"/>
+                  <a:srgbClr val="C23B1E"/>
                 </a:solidFill>
                 <a:latin typeface="Zen Kaku Gothic New"/>
                 <a:ea typeface="Zen Kaku Gothic New"/>
@@ -4326,7 +4326,7 @@
             <a:r>
               <a:rPr sz="1600" b="1">
                 <a:solidFill>
-                  <a:srgbClr val="F3EEE1"/>
+                  <a:srgbClr val="1B2A24"/>
                 </a:solidFill>
                 <a:latin typeface="Zen Kaku Gothic New"/>
                 <a:ea typeface="Zen Kaku Gothic New"/>
@@ -4347,7 +4347,7 @@
             <a:r>
               <a:rPr sz="960" b="0">
                 <a:solidFill>
-                  <a:srgbClr val="EE5A3C"/>
+                  <a:srgbClr val="C23B1E"/>
                 </a:solidFill>
                 <a:latin typeface="Zen Kaku Gothic New"/>
                 <a:ea typeface="Zen Kaku Gothic New"/>
@@ -4358,7 +4358,7 @@
             <a:r>
               <a:rPr sz="1600" b="0">
                 <a:solidFill>
-                  <a:srgbClr val="F3EEE1"/>
+                  <a:srgbClr val="1B2A24"/>
                 </a:solidFill>
                 <a:latin typeface="Zen Kaku Gothic New"/>
                 <a:ea typeface="Zen Kaku Gothic New"/>
@@ -4379,7 +4379,7 @@
             <a:r>
               <a:rPr sz="960" b="0">
                 <a:solidFill>
-                  <a:srgbClr val="EE5A3C"/>
+                  <a:srgbClr val="C23B1E"/>
                 </a:solidFill>
                 <a:latin typeface="Zen Kaku Gothic New"/>
                 <a:ea typeface="Zen Kaku Gothic New"/>
@@ -4390,7 +4390,7 @@
             <a:r>
               <a:rPr sz="1600" b="0">
                 <a:solidFill>
-                  <a:srgbClr val="A7BCB1"/>
+                  <a:srgbClr val="4E5F57"/>
                 </a:solidFill>
                 <a:latin typeface="Zen Kaku Gothic New"/>
                 <a:ea typeface="Zen Kaku Gothic New"/>
@@ -4401,7 +4401,7 @@
             <a:r>
               <a:rPr sz="1600" b="1">
                 <a:solidFill>
-                  <a:srgbClr val="F3EEE1"/>
+                  <a:srgbClr val="1B2A24"/>
                 </a:solidFill>
                 <a:latin typeface="Zen Kaku Gothic New"/>
                 <a:ea typeface="Zen Kaku Gothic New"/>
@@ -4427,7 +4427,7 @@
             <a:avLst/>
           </a:prstGeom>
           <a:solidFill>
-            <a:srgbClr val="EE5A3C"/>
+            <a:srgbClr val="C23B1E"/>
           </a:solidFill>
           <a:ln>
             <a:noFill/>
@@ -4489,7 +4489,7 @@
             <a:r>
               <a:rPr sz="1500" b="0">
                 <a:solidFill>
-                  <a:srgbClr val="F3EEE1"/>
+                  <a:srgbClr val="FFFFFF"/>
                 </a:solidFill>
                 <a:latin typeface="Zen Kaku Gothic New"/>
                 <a:ea typeface="Zen Kaku Gothic New"/>
@@ -4510,7 +4510,7 @@
             <a:r>
               <a:rPr sz="1700" b="1">
                 <a:solidFill>
-                  <a:srgbClr val="F3EEE1"/>
+                  <a:srgbClr val="FFFFFF"/>
                 </a:solidFill>
                 <a:latin typeface="Zen Kaku Gothic New"/>
                 <a:ea typeface="Zen Kaku Gothic New"/>
@@ -4531,7 +4531,7 @@
             <a:r>
               <a:rPr sz="6400" b="0">
                 <a:solidFill>
-                  <a:srgbClr val="F3EEE1"/>
+                  <a:srgbClr val="FFFFFF"/>
                 </a:solidFill>
                 <a:latin typeface="Dela Gothic One"/>
                 <a:ea typeface="Dela Gothic One"/>
@@ -4575,7 +4575,7 @@
             <a:r>
               <a:rPr sz="1100" b="0">
                 <a:solidFill>
-                  <a:srgbClr val="A7BCB1"/>
+                  <a:srgbClr val="4E5F57"/>
                 </a:solidFill>
                 <a:latin typeface="Zen Kaku Gothic New"/>
                 <a:ea typeface="Zen Kaku Gothic New"/>
@@ -4586,7 +4586,7 @@
             <a:r>
               <a:rPr sz="1100" b="1">
                 <a:solidFill>
-                  <a:srgbClr val="A7BCB1"/>
+                  <a:srgbClr val="4E5F57"/>
                 </a:solidFill>
                 <a:latin typeface="Zen Kaku Gothic New"/>
                 <a:ea typeface="Zen Kaku Gothic New"/>
@@ -4611,7 +4611,7 @@
     <p:bg>
       <p:bgPr>
         <a:solidFill>
-          <a:srgbClr val="0F2B23"/>
+          <a:srgbClr val="F5F1E6"/>
         </a:solidFill>
         <a:effectLst/>
       </p:bgPr>
@@ -4656,7 +4656,7 @@
             <a:r>
               <a:rPr sz="1800" b="1">
                 <a:solidFill>
-                  <a:srgbClr val="A7BCB1"/>
+                  <a:srgbClr val="4E5F57"/>
                 </a:solidFill>
                 <a:latin typeface="Zen Kaku Gothic New"/>
                 <a:ea typeface="Zen Kaku Gothic New"/>
@@ -4667,7 +4667,7 @@
             <a:r>
               <a:rPr sz="4400" b="0">
                 <a:solidFill>
-                  <a:srgbClr val="EE5A3C"/>
+                  <a:srgbClr val="C23B1E"/>
                 </a:solidFill>
                 <a:latin typeface="Dela Gothic One"/>
                 <a:ea typeface="Dela Gothic One"/>
@@ -4711,7 +4711,7 @@
             <a:r>
               <a:rPr sz="1800" b="0">
                 <a:solidFill>
-                  <a:srgbClr val="F3EEE1"/>
+                  <a:srgbClr val="1B2A24"/>
                 </a:solidFill>
                 <a:latin typeface="Zen Kaku Gothic New"/>
                 <a:ea typeface="Zen Kaku Gothic New"/>
@@ -4722,7 +4722,7 @@
             <a:r>
               <a:rPr sz="1800" b="1">
                 <a:solidFill>
-                  <a:srgbClr val="EE5A3C"/>
+                  <a:srgbClr val="C23B1E"/>
                 </a:solidFill>
                 <a:latin typeface="Zen Kaku Gothic New"/>
                 <a:ea typeface="Zen Kaku Gothic New"/>
@@ -4748,7 +4748,7 @@
             <a:avLst/>
           </a:prstGeom>
           <a:solidFill>
-            <a:srgbClr val="F3EEE1"/>
+            <a:srgbClr val="1B2A24"/>
           </a:solidFill>
           <a:ln>
             <a:noFill/>
@@ -4810,7 +4810,7 @@
             <a:r>
               <a:rPr sz="1400" b="1">
                 <a:solidFill>
-                  <a:srgbClr val="0F2B23"/>
+                  <a:srgbClr val="F5F1E6"/>
                 </a:solidFill>
                 <a:latin typeface="Zen Kaku Gothic New"/>
                 <a:ea typeface="Zen Kaku Gothic New"/>
@@ -4831,7 +4831,7 @@
             <a:r>
               <a:rPr sz="4000" b="0">
                 <a:solidFill>
-                  <a:srgbClr val="0F2B23"/>
+                  <a:srgbClr val="F5F1E6"/>
                 </a:solidFill>
                 <a:latin typeface="Dela Gothic One"/>
                 <a:ea typeface="Dela Gothic One"/>
@@ -4857,7 +4857,7 @@
             <a:avLst/>
           </a:prstGeom>
           <a:solidFill>
-            <a:srgbClr val="163A2F"/>
+            <a:srgbClr val="E3ECE5"/>
           </a:solidFill>
           <a:ln>
             <a:noFill/>
@@ -4919,7 +4919,7 @@
             <a:r>
               <a:rPr sz="1400" b="1">
                 <a:solidFill>
-                  <a:srgbClr val="A7BCB1"/>
+                  <a:srgbClr val="4E5F57"/>
                 </a:solidFill>
                 <a:latin typeface="Zen Kaku Gothic New"/>
                 <a:ea typeface="Zen Kaku Gothic New"/>
@@ -4940,7 +4940,7 @@
             <a:r>
               <a:rPr sz="4000" b="0">
                 <a:solidFill>
-                  <a:srgbClr val="F3EEE1"/>
+                  <a:srgbClr val="1B2A24"/>
                 </a:solidFill>
                 <a:latin typeface="Dela Gothic One"/>
                 <a:ea typeface="Dela Gothic One"/>
@@ -4984,7 +4984,7 @@
             <a:r>
               <a:rPr sz="2000" b="1">
                 <a:solidFill>
-                  <a:srgbClr val="F3EEE1"/>
+                  <a:srgbClr val="1B2A24"/>
                 </a:solidFill>
                 <a:latin typeface="Zen Kaku Gothic New"/>
                 <a:ea typeface="Zen Kaku Gothic New"/>
@@ -5028,7 +5028,7 @@
             <a:r>
               <a:rPr sz="1500" b="0">
                 <a:solidFill>
-                  <a:srgbClr val="A7BCB1"/>
+                  <a:srgbClr val="4E5F57"/>
                 </a:solidFill>
                 <a:latin typeface="Zen Kaku Gothic New"/>
                 <a:ea typeface="Zen Kaku Gothic New"/>
@@ -5054,7 +5054,7 @@
             <a:avLst/>
           </a:prstGeom>
           <a:solidFill>
-            <a:srgbClr val="2B5547"/>
+            <a:srgbClr val="C9C2AE"/>
           </a:solidFill>
           <a:ln>
             <a:noFill/>
@@ -5116,7 +5116,7 @@
             <a:r>
               <a:rPr sz="1700" b="0">
                 <a:solidFill>
-                  <a:srgbClr val="F3EEE1"/>
+                  <a:srgbClr val="1B2A24"/>
                 </a:solidFill>
                 <a:latin typeface="Zen Kaku Gothic New"/>
                 <a:ea typeface="Zen Kaku Gothic New"/>
@@ -5137,7 +5137,7 @@
             <a:r>
               <a:rPr sz="1700" b="0">
                 <a:solidFill>
-                  <a:srgbClr val="F3EEE1"/>
+                  <a:srgbClr val="1B2A24"/>
                 </a:solidFill>
                 <a:latin typeface="Zen Kaku Gothic New"/>
                 <a:ea typeface="Zen Kaku Gothic New"/>
@@ -5158,7 +5158,7 @@
             <a:r>
               <a:rPr sz="2600" b="0">
                 <a:solidFill>
-                  <a:srgbClr val="EE5A3C"/>
+                  <a:srgbClr val="C23B1E"/>
                 </a:solidFill>
                 <a:latin typeface="Dela Gothic One"/>
                 <a:ea typeface="Dela Gothic One"/>
@@ -5179,7 +5179,7 @@
             <a:r>
               <a:rPr sz="2600" b="0">
                 <a:solidFill>
-                  <a:srgbClr val="EE5A3C"/>
+                  <a:srgbClr val="C23B1E"/>
                 </a:solidFill>
                 <a:latin typeface="Dela Gothic One"/>
                 <a:ea typeface="Dela Gothic One"/>
@@ -5223,7 +5223,7 @@
             <a:r>
               <a:rPr sz="1100" b="0">
                 <a:solidFill>
-                  <a:srgbClr val="A7BCB1"/>
+                  <a:srgbClr val="4E5F57"/>
                 </a:solidFill>
                 <a:latin typeface="Zen Kaku Gothic New"/>
                 <a:ea typeface="Zen Kaku Gothic New"/>
@@ -5234,7 +5234,7 @@
             <a:r>
               <a:rPr sz="1100" b="1">
                 <a:solidFill>
-                  <a:srgbClr val="A7BCB1"/>
+                  <a:srgbClr val="4E5F57"/>
                 </a:solidFill>
                 <a:latin typeface="Zen Kaku Gothic New"/>
                 <a:ea typeface="Zen Kaku Gothic New"/>
@@ -5259,7 +5259,7 @@
     <p:bg>
       <p:bgPr>
         <a:solidFill>
-          <a:srgbClr val="0F2B23"/>
+          <a:srgbClr val="F5F1E6"/>
         </a:solidFill>
         <a:effectLst/>
       </p:bgPr>
@@ -5304,7 +5304,7 @@
             <a:r>
               <a:rPr sz="1800" b="1">
                 <a:solidFill>
-                  <a:srgbClr val="A7BCB1"/>
+                  <a:srgbClr val="4E5F57"/>
                 </a:solidFill>
                 <a:latin typeface="Zen Kaku Gothic New"/>
                 <a:ea typeface="Zen Kaku Gothic New"/>
@@ -5315,7 +5315,7 @@
             <a:r>
               <a:rPr sz="4400" b="0">
                 <a:solidFill>
-                  <a:srgbClr val="EE5A3C"/>
+                  <a:srgbClr val="C23B1E"/>
                 </a:solidFill>
                 <a:latin typeface="Dela Gothic One"/>
                 <a:ea typeface="Dela Gothic One"/>
@@ -5341,7 +5341,7 @@
             <a:avLst/>
           </a:prstGeom>
           <a:solidFill>
-            <a:srgbClr val="2B5547"/>
+            <a:srgbClr val="C9C2AE"/>
           </a:solidFill>
           <a:ln>
             <a:noFill/>
@@ -5403,7 +5403,7 @@
             <a:r>
               <a:rPr sz="2400" b="0">
                 <a:solidFill>
-                  <a:srgbClr val="F3EEE1"/>
+                  <a:srgbClr val="1B2A24"/>
                 </a:solidFill>
                 <a:latin typeface="Dela Gothic One"/>
                 <a:ea typeface="Dela Gothic One"/>
@@ -5447,7 +5447,7 @@
             <a:r>
               <a:rPr sz="1600" b="0">
                 <a:solidFill>
-                  <a:srgbClr val="A7BCB1"/>
+                  <a:srgbClr val="4E5F57"/>
                 </a:solidFill>
                 <a:latin typeface="Zen Kaku Gothic New"/>
                 <a:ea typeface="Zen Kaku Gothic New"/>
@@ -5473,7 +5473,7 @@
             <a:avLst/>
           </a:prstGeom>
           <a:solidFill>
-            <a:srgbClr val="2B5547"/>
+            <a:srgbClr val="C9C2AE"/>
           </a:solidFill>
           <a:ln>
             <a:noFill/>
@@ -5535,7 +5535,7 @@
             <a:r>
               <a:rPr sz="2400" b="0">
                 <a:solidFill>
-                  <a:srgbClr val="F3EEE1"/>
+                  <a:srgbClr val="1B2A24"/>
                 </a:solidFill>
                 <a:latin typeface="Dela Gothic One"/>
                 <a:ea typeface="Dela Gothic One"/>
@@ -5579,7 +5579,7 @@
             <a:r>
               <a:rPr sz="1600" b="0">
                 <a:solidFill>
-                  <a:srgbClr val="A7BCB1"/>
+                  <a:srgbClr val="4E5F57"/>
                 </a:solidFill>
                 <a:latin typeface="Zen Kaku Gothic New"/>
                 <a:ea typeface="Zen Kaku Gothic New"/>
@@ -5605,7 +5605,7 @@
             <a:avLst/>
           </a:prstGeom>
           <a:solidFill>
-            <a:srgbClr val="EE5A3C"/>
+            <a:srgbClr val="C23B1E"/>
           </a:solidFill>
           <a:ln>
             <a:noFill/>
@@ -5667,7 +5667,7 @@
             <a:r>
               <a:rPr sz="2400" b="0">
                 <a:solidFill>
-                  <a:srgbClr val="EE5A3C"/>
+                  <a:srgbClr val="C23B1E"/>
                 </a:solidFill>
                 <a:latin typeface="Dela Gothic One"/>
                 <a:ea typeface="Dela Gothic One"/>
@@ -5711,7 +5711,7 @@
             <a:r>
               <a:rPr sz="1600" b="1">
                 <a:solidFill>
-                  <a:srgbClr val="F3EEE1"/>
+                  <a:srgbClr val="1B2A24"/>
                 </a:solidFill>
                 <a:latin typeface="Zen Kaku Gothic New"/>
                 <a:ea typeface="Zen Kaku Gothic New"/>
@@ -5755,7 +5755,7 @@
             <a:r>
               <a:rPr sz="1100" b="0">
                 <a:solidFill>
-                  <a:srgbClr val="A7BCB1"/>
+                  <a:srgbClr val="4E5F57"/>
                 </a:solidFill>
                 <a:latin typeface="Zen Kaku Gothic New"/>
                 <a:ea typeface="Zen Kaku Gothic New"/>
@@ -5766,7 +5766,7 @@
             <a:r>
               <a:rPr sz="1100" b="1">
                 <a:solidFill>
-                  <a:srgbClr val="A7BCB1"/>
+                  <a:srgbClr val="4E5F57"/>
                 </a:solidFill>
                 <a:latin typeface="Zen Kaku Gothic New"/>
                 <a:ea typeface="Zen Kaku Gothic New"/>
@@ -5791,7 +5791,7 @@
     <p:bg>
       <p:bgPr>
         <a:solidFill>
-          <a:srgbClr val="0F2B23"/>
+          <a:srgbClr val="F5F1E6"/>
         </a:solidFill>
         <a:effectLst/>
       </p:bgPr>
@@ -5836,7 +5836,7 @@
             <a:r>
               <a:rPr sz="1800" b="1">
                 <a:solidFill>
-                  <a:srgbClr val="A7BCB1"/>
+                  <a:srgbClr val="4E5F57"/>
                 </a:solidFill>
                 <a:latin typeface="Zen Kaku Gothic New"/>
                 <a:ea typeface="Zen Kaku Gothic New"/>
@@ -5847,7 +5847,7 @@
             <a:r>
               <a:rPr sz="4400" b="0">
                 <a:solidFill>
-                  <a:srgbClr val="F3EEE1"/>
+                  <a:srgbClr val="1B2A24"/>
                 </a:solidFill>
                 <a:latin typeface="Dela Gothic One"/>
                 <a:ea typeface="Dela Gothic One"/>
@@ -5873,7 +5873,7 @@
             <a:avLst/>
           </a:prstGeom>
           <a:solidFill>
-            <a:srgbClr val="EE5A3C"/>
+            <a:srgbClr val="C23B1E"/>
           </a:solidFill>
           <a:ln>
             <a:noFill/>
@@ -5935,7 +5935,7 @@
             <a:r>
               <a:rPr sz="1400" b="1">
                 <a:solidFill>
-                  <a:srgbClr val="F3EEE1"/>
+                  <a:srgbClr val="FFFFFF"/>
                 </a:solidFill>
                 <a:latin typeface="Zen Kaku Gothic New"/>
                 <a:ea typeface="Zen Kaku Gothic New"/>
@@ -5946,7 +5946,7 @@
             <a:r>
               <a:rPr sz="2600" b="0">
                 <a:solidFill>
-                  <a:srgbClr val="F3EEE1"/>
+                  <a:srgbClr val="FFFFFF"/>
                 </a:solidFill>
                 <a:latin typeface="Dela Gothic One"/>
                 <a:ea typeface="Dela Gothic One"/>
@@ -5990,7 +5990,7 @@
             <a:r>
               <a:rPr sz="1400" b="0">
                 <a:solidFill>
-                  <a:srgbClr val="A7BCB1"/>
+                  <a:srgbClr val="4E5F57"/>
                 </a:solidFill>
                 <a:latin typeface="Zen Kaku Gothic New"/>
                 <a:ea typeface="Zen Kaku Gothic New"/>
@@ -6034,7 +6034,7 @@
             <a:r>
               <a:rPr sz="3600" b="0">
                 <a:solidFill>
-                  <a:srgbClr val="EE5A3C"/>
+                  <a:srgbClr val="C23B1E"/>
                 </a:solidFill>
                 <a:latin typeface="Dela Gothic One"/>
                 <a:ea typeface="Dela Gothic One"/>
@@ -6078,7 +6078,7 @@
             <a:r>
               <a:rPr sz="1600" b="1">
                 <a:solidFill>
-                  <a:srgbClr val="A7BCB1"/>
+                  <a:srgbClr val="4E5F57"/>
                 </a:solidFill>
                 <a:latin typeface="Zen Kaku Gothic New"/>
                 <a:ea typeface="Zen Kaku Gothic New"/>
@@ -6122,7 +6122,7 @@
             <a:r>
               <a:rPr sz="2200" b="1">
                 <a:solidFill>
-                  <a:srgbClr val="F3EEE1"/>
+                  <a:srgbClr val="1B2A24"/>
                 </a:solidFill>
                 <a:latin typeface="Zen Kaku Gothic New"/>
                 <a:ea typeface="Zen Kaku Gothic New"/>
@@ -6148,10 +6148,12 @@
             <a:avLst/>
           </a:prstGeom>
           <a:solidFill>
-            <a:srgbClr val="F6F1E4"/>
+            <a:srgbClr val="FFFFFF"/>
           </a:solidFill>
-          <a:ln>
-            <a:noFill/>
+          <a:ln w="12700">
+            <a:solidFill>
+              <a:srgbClr val="C9C2AE"/>
+            </a:solidFill>
           </a:ln>
           <a:effectLst/>
         </p:spPr>
@@ -6234,7 +6236,7 @@
             <a:r>
               <a:rPr sz="3600" b="0">
                 <a:solidFill>
-                  <a:srgbClr val="EE5A3C"/>
+                  <a:srgbClr val="C23B1E"/>
                 </a:solidFill>
                 <a:latin typeface="Dela Gothic One"/>
                 <a:ea typeface="Dela Gothic One"/>
@@ -6278,13 +6280,13 @@
             <a:r>
               <a:rPr sz="1600" b="1">
                 <a:solidFill>
-                  <a:srgbClr val="A7BCB1"/>
-                </a:solidFill>
-                <a:latin typeface="Zen Kaku Gothic New"/>
-                <a:ea typeface="Zen Kaku Gothic New"/>
-                <a:cs typeface="Zen Kaku Gothic New"/>
-              </a:rPr>
-              <a:t>三麻　東三局　南家　5巡目　40000点持ち</a:t>
+                  <a:srgbClr val="4E5F57"/>
+                </a:solidFill>
+                <a:latin typeface="Zen Kaku Gothic New"/>
+                <a:ea typeface="Zen Kaku Gothic New"/>
+                <a:cs typeface="Zen Kaku Gothic New"/>
+              </a:rPr>
+              <a:t>三麻　東三局　西家　5巡目　40000点持ち</a:t>
             </a:r>
           </a:p>
         </p:txBody>
@@ -6322,7 +6324,7 @@
             <a:r>
               <a:rPr sz="2200" b="1">
                 <a:solidFill>
-                  <a:srgbClr val="F3EEE1"/>
+                  <a:srgbClr val="1B2A24"/>
                 </a:solidFill>
                 <a:latin typeface="Zen Kaku Gothic New"/>
                 <a:ea typeface="Zen Kaku Gothic New"/>
@@ -6348,10 +6350,12 @@
             <a:avLst/>
           </a:prstGeom>
           <a:solidFill>
-            <a:srgbClr val="F6F1E4"/>
+            <a:srgbClr val="FFFFFF"/>
           </a:solidFill>
-          <a:ln>
-            <a:noFill/>
+          <a:ln w="12700">
+            <a:solidFill>
+              <a:srgbClr val="C9C2AE"/>
+            </a:solidFill>
           </a:ln>
           <a:effectLst/>
         </p:spPr>
@@ -6434,7 +6438,7 @@
             <a:r>
               <a:rPr sz="1100" b="0">
                 <a:solidFill>
-                  <a:srgbClr val="A7BCB1"/>
+                  <a:srgbClr val="4E5F57"/>
                 </a:solidFill>
                 <a:latin typeface="Zen Kaku Gothic New"/>
                 <a:ea typeface="Zen Kaku Gothic New"/>
@@ -6445,7 +6449,7 @@
             <a:r>
               <a:rPr sz="1100" b="1">
                 <a:solidFill>
-                  <a:srgbClr val="A7BCB1"/>
+                  <a:srgbClr val="4E5F57"/>
                 </a:solidFill>
                 <a:latin typeface="Zen Kaku Gothic New"/>
                 <a:ea typeface="Zen Kaku Gothic New"/>
@@ -6470,7 +6474,7 @@
     <p:bg>
       <p:bgPr>
         <a:solidFill>
-          <a:srgbClr val="0F2B23"/>
+          <a:srgbClr val="F5F1E6"/>
         </a:solidFill>
         <a:effectLst/>
       </p:bgPr>
@@ -6515,7 +6519,7 @@
             <a:r>
               <a:rPr sz="1800" b="1">
                 <a:solidFill>
-                  <a:srgbClr val="A7BCB1"/>
+                  <a:srgbClr val="4E5F57"/>
                 </a:solidFill>
                 <a:latin typeface="Zen Kaku Gothic New"/>
                 <a:ea typeface="Zen Kaku Gothic New"/>
@@ -6526,7 +6530,7 @@
             <a:r>
               <a:rPr sz="4400" b="0">
                 <a:solidFill>
-                  <a:srgbClr val="F3EEE1"/>
+                  <a:srgbClr val="1B2A24"/>
                 </a:solidFill>
                 <a:latin typeface="Dela Gothic One"/>
                 <a:ea typeface="Dela Gothic One"/>
@@ -6552,7 +6556,7 @@
             <a:avLst/>
           </a:prstGeom>
           <a:solidFill>
-            <a:srgbClr val="EE5A3C"/>
+            <a:srgbClr val="C23B1E"/>
           </a:solidFill>
           <a:ln>
             <a:noFill/>
@@ -6614,7 +6618,7 @@
             <a:r>
               <a:rPr sz="1400" b="1">
                 <a:solidFill>
-                  <a:srgbClr val="F3EEE1"/>
+                  <a:srgbClr val="FFFFFF"/>
                 </a:solidFill>
                 <a:latin typeface="Zen Kaku Gothic New"/>
                 <a:ea typeface="Zen Kaku Gothic New"/>
@@ -6625,7 +6629,7 @@
             <a:r>
               <a:rPr sz="2600" b="0">
                 <a:solidFill>
-                  <a:srgbClr val="F3EEE1"/>
+                  <a:srgbClr val="FFFFFF"/>
                 </a:solidFill>
                 <a:latin typeface="Dela Gothic One"/>
                 <a:ea typeface="Dela Gothic One"/>
@@ -6669,7 +6673,7 @@
             <a:r>
               <a:rPr sz="1400" b="0">
                 <a:solidFill>
-                  <a:srgbClr val="A7BCB1"/>
+                  <a:srgbClr val="4E5F57"/>
                 </a:solidFill>
                 <a:latin typeface="Zen Kaku Gothic New"/>
                 <a:ea typeface="Zen Kaku Gothic New"/>
@@ -6713,7 +6717,7 @@
             <a:r>
               <a:rPr sz="3600" b="0">
                 <a:solidFill>
-                  <a:srgbClr val="EE5A3C"/>
+                  <a:srgbClr val="C23B1E"/>
                 </a:solidFill>
                 <a:latin typeface="Dela Gothic One"/>
                 <a:ea typeface="Dela Gothic One"/>
@@ -6757,7 +6761,7 @@
             <a:r>
               <a:rPr sz="1600" b="1">
                 <a:solidFill>
-                  <a:srgbClr val="A7BCB1"/>
+                  <a:srgbClr val="4E5F57"/>
                 </a:solidFill>
                 <a:latin typeface="Zen Kaku Gothic New"/>
                 <a:ea typeface="Zen Kaku Gothic New"/>
@@ -6801,7 +6805,7 @@
             <a:r>
               <a:rPr sz="2200" b="1">
                 <a:solidFill>
-                  <a:srgbClr val="F3EEE1"/>
+                  <a:srgbClr val="1B2A24"/>
                 </a:solidFill>
                 <a:latin typeface="Zen Kaku Gothic New"/>
                 <a:ea typeface="Zen Kaku Gothic New"/>
@@ -6827,10 +6831,12 @@
             <a:avLst/>
           </a:prstGeom>
           <a:solidFill>
-            <a:srgbClr val="F6F1E4"/>
+            <a:srgbClr val="FFFFFF"/>
           </a:solidFill>
-          <a:ln>
-            <a:noFill/>
+          <a:ln w="12700">
+            <a:solidFill>
+              <a:srgbClr val="C9C2AE"/>
+            </a:solidFill>
           </a:ln>
           <a:effectLst/>
         </p:spPr>
@@ -6913,7 +6919,7 @@
             <a:r>
               <a:rPr sz="3600" b="0">
                 <a:solidFill>
-                  <a:srgbClr val="EE5A3C"/>
+                  <a:srgbClr val="C23B1E"/>
                 </a:solidFill>
                 <a:latin typeface="Dela Gothic One"/>
                 <a:ea typeface="Dela Gothic One"/>
@@ -6957,7 +6963,7 @@
             <a:r>
               <a:rPr sz="1600" b="1">
                 <a:solidFill>
-                  <a:srgbClr val="A7BCB1"/>
+                  <a:srgbClr val="4E5F57"/>
                 </a:solidFill>
                 <a:latin typeface="Zen Kaku Gothic New"/>
                 <a:ea typeface="Zen Kaku Gothic New"/>
@@ -7001,7 +7007,7 @@
             <a:r>
               <a:rPr sz="2200" b="1">
                 <a:solidFill>
-                  <a:srgbClr val="F3EEE1"/>
+                  <a:srgbClr val="1B2A24"/>
                 </a:solidFill>
                 <a:latin typeface="Zen Kaku Gothic New"/>
                 <a:ea typeface="Zen Kaku Gothic New"/>
@@ -7027,10 +7033,12 @@
             <a:avLst/>
           </a:prstGeom>
           <a:solidFill>
-            <a:srgbClr val="F6F1E4"/>
+            <a:srgbClr val="FFFFFF"/>
           </a:solidFill>
-          <a:ln>
-            <a:noFill/>
+          <a:ln w="12700">
+            <a:solidFill>
+              <a:srgbClr val="C9C2AE"/>
+            </a:solidFill>
           </a:ln>
           <a:effectLst/>
         </p:spPr>
@@ -7113,7 +7121,7 @@
             <a:r>
               <a:rPr sz="1100" b="0">
                 <a:solidFill>
-                  <a:srgbClr val="A7BCB1"/>
+                  <a:srgbClr val="4E5F57"/>
                 </a:solidFill>
                 <a:latin typeface="Zen Kaku Gothic New"/>
                 <a:ea typeface="Zen Kaku Gothic New"/>
@@ -7124,7 +7132,7 @@
             <a:r>
               <a:rPr sz="1100" b="1">
                 <a:solidFill>
-                  <a:srgbClr val="A7BCB1"/>
+                  <a:srgbClr val="4E5F57"/>
                 </a:solidFill>
                 <a:latin typeface="Zen Kaku Gothic New"/>
                 <a:ea typeface="Zen Kaku Gothic New"/>
@@ -7149,7 +7157,7 @@
     <p:bg>
       <p:bgPr>
         <a:solidFill>
-          <a:srgbClr val="0F2B23"/>
+          <a:srgbClr val="F5F1E6"/>
         </a:solidFill>
         <a:effectLst/>
       </p:bgPr>
@@ -7194,7 +7202,7 @@
             <a:r>
               <a:rPr sz="1800" b="1">
                 <a:solidFill>
-                  <a:srgbClr val="A7BCB1"/>
+                  <a:srgbClr val="4E5F57"/>
                 </a:solidFill>
                 <a:latin typeface="Zen Kaku Gothic New"/>
                 <a:ea typeface="Zen Kaku Gothic New"/>
@@ -7205,7 +7213,7 @@
             <a:r>
               <a:rPr sz="4000" b="0">
                 <a:solidFill>
-                  <a:srgbClr val="EE5A3C"/>
+                  <a:srgbClr val="C23B1E"/>
                 </a:solidFill>
                 <a:latin typeface="Dela Gothic One"/>
                 <a:ea typeface="Dela Gothic One"/>
@@ -7249,7 +7257,7 @@
             <a:r>
               <a:rPr sz="1400" b="1">
                 <a:solidFill>
-                  <a:srgbClr val="A7BCB1"/>
+                  <a:srgbClr val="4E5F57"/>
                 </a:solidFill>
                 <a:latin typeface="Zen Kaku Gothic New"/>
                 <a:ea typeface="Zen Kaku Gothic New"/>
@@ -7275,10 +7283,12 @@
             <a:avLst/>
           </a:prstGeom>
           <a:solidFill>
-            <a:srgbClr val="F6F1E4"/>
+            <a:srgbClr val="FFFFFF"/>
           </a:solidFill>
-          <a:ln>
-            <a:noFill/>
+          <a:ln w="12700">
+            <a:solidFill>
+              <a:srgbClr val="C9C2AE"/>
+            </a:solidFill>
           </a:ln>
           <a:effectLst/>
         </p:spPr>
@@ -7343,7 +7353,7 @@
             <a:avLst/>
           </a:prstGeom>
           <a:solidFill>
-            <a:srgbClr val="F3EEE1"/>
+            <a:srgbClr val="1B2A24"/>
           </a:solidFill>
           <a:ln>
             <a:noFill/>
@@ -7405,7 +7415,7 @@
             <a:r>
               <a:rPr sz="2800" b="0">
                 <a:solidFill>
-                  <a:srgbClr val="0F2B23"/>
+                  <a:srgbClr val="F5F1E6"/>
                 </a:solidFill>
                 <a:latin typeface="Dela Gothic One"/>
                 <a:ea typeface="Dela Gothic One"/>
@@ -7449,7 +7459,7 @@
             <a:r>
               <a:rPr sz="1500" b="0">
                 <a:solidFill>
-                  <a:srgbClr val="A7BCB1"/>
+                  <a:srgbClr val="4E5F57"/>
                 </a:solidFill>
                 <a:latin typeface="Zen Kaku Gothic New"/>
                 <a:ea typeface="Zen Kaku Gothic New"/>
@@ -7493,7 +7503,7 @@
             <a:r>
               <a:rPr sz="869" b="0">
                 <a:solidFill>
-                  <a:srgbClr val="EE5A3C"/>
+                  <a:srgbClr val="C23B1E"/>
                 </a:solidFill>
                 <a:latin typeface="Zen Kaku Gothic New"/>
                 <a:ea typeface="Zen Kaku Gothic New"/>
@@ -7504,7 +7514,7 @@
             <a:r>
               <a:rPr sz="1450" b="0">
                 <a:solidFill>
-                  <a:srgbClr val="F3EEE1"/>
+                  <a:srgbClr val="1B2A24"/>
                 </a:solidFill>
                 <a:latin typeface="Zen Kaku Gothic New"/>
                 <a:ea typeface="Zen Kaku Gothic New"/>
@@ -7525,7 +7535,7 @@
             <a:r>
               <a:rPr sz="869" b="0">
                 <a:solidFill>
-                  <a:srgbClr val="EE5A3C"/>
+                  <a:srgbClr val="C23B1E"/>
                 </a:solidFill>
                 <a:latin typeface="Zen Kaku Gothic New"/>
                 <a:ea typeface="Zen Kaku Gothic New"/>
@@ -7536,7 +7546,7 @@
             <a:r>
               <a:rPr sz="1450" b="0">
                 <a:solidFill>
-                  <a:srgbClr val="F3EEE1"/>
+                  <a:srgbClr val="1B2A24"/>
                 </a:solidFill>
                 <a:latin typeface="Zen Kaku Gothic New"/>
                 <a:ea typeface="Zen Kaku Gothic New"/>
@@ -7562,7 +7572,7 @@
             <a:avLst/>
           </a:prstGeom>
           <a:solidFill>
-            <a:srgbClr val="163A2F"/>
+            <a:srgbClr val="E3ECE5"/>
           </a:solidFill>
           <a:ln>
             <a:noFill/>
@@ -7606,7 +7616,7 @@
             <a:avLst/>
           </a:prstGeom>
           <a:solidFill>
-            <a:srgbClr val="EE5A3C"/>
+            <a:srgbClr val="C23B1E"/>
           </a:solidFill>
           <a:ln>
             <a:noFill/>
@@ -7668,7 +7678,7 @@
             <a:r>
               <a:rPr sz="1700" b="1">
                 <a:solidFill>
-                  <a:srgbClr val="F3EEE1"/>
+                  <a:srgbClr val="1B2A24"/>
                 </a:solidFill>
                 <a:latin typeface="Zen Kaku Gothic New"/>
                 <a:ea typeface="Zen Kaku Gothic New"/>
@@ -7712,7 +7722,7 @@
             <a:r>
               <a:rPr sz="1100" b="0">
                 <a:solidFill>
-                  <a:srgbClr val="A7BCB1"/>
+                  <a:srgbClr val="4E5F57"/>
                 </a:solidFill>
                 <a:latin typeface="Zen Kaku Gothic New"/>
                 <a:ea typeface="Zen Kaku Gothic New"/>
@@ -7723,7 +7733,7 @@
             <a:r>
               <a:rPr sz="1100" b="1">
                 <a:solidFill>
-                  <a:srgbClr val="A7BCB1"/>
+                  <a:srgbClr val="4E5F57"/>
                 </a:solidFill>
                 <a:latin typeface="Zen Kaku Gothic New"/>
                 <a:ea typeface="Zen Kaku Gothic New"/>
@@ -7748,7 +7758,7 @@
     <p:bg>
       <p:bgPr>
         <a:solidFill>
-          <a:srgbClr val="0F2B23"/>
+          <a:srgbClr val="F5F1E6"/>
         </a:solidFill>
         <a:effectLst/>
       </p:bgPr>
@@ -7793,7 +7803,7 @@
             <a:r>
               <a:rPr sz="1800" b="1">
                 <a:solidFill>
-                  <a:srgbClr val="A7BCB1"/>
+                  <a:srgbClr val="4E5F57"/>
                 </a:solidFill>
                 <a:latin typeface="Zen Kaku Gothic New"/>
                 <a:ea typeface="Zen Kaku Gothic New"/>
@@ -7804,7 +7814,7 @@
             <a:r>
               <a:rPr sz="4000" b="0">
                 <a:solidFill>
-                  <a:srgbClr val="EE5A3C"/>
+                  <a:srgbClr val="C23B1E"/>
                 </a:solidFill>
                 <a:latin typeface="Dela Gothic One"/>
                 <a:ea typeface="Dela Gothic One"/>
@@ -7848,7 +7858,7 @@
             <a:r>
               <a:rPr sz="1400" b="1">
                 <a:solidFill>
-                  <a:srgbClr val="A7BCB1"/>
+                  <a:srgbClr val="4E5F57"/>
                 </a:solidFill>
                 <a:latin typeface="Zen Kaku Gothic New"/>
                 <a:ea typeface="Zen Kaku Gothic New"/>
@@ -7874,10 +7884,12 @@
             <a:avLst/>
           </a:prstGeom>
           <a:solidFill>
-            <a:srgbClr val="F6F1E4"/>
+            <a:srgbClr val="FFFFFF"/>
           </a:solidFill>
-          <a:ln>
-            <a:noFill/>
+          <a:ln w="12700">
+            <a:solidFill>
+              <a:srgbClr val="C9C2AE"/>
+            </a:solidFill>
           </a:ln>
           <a:effectLst/>
         </p:spPr>
@@ -7942,7 +7954,7 @@
             <a:avLst/>
           </a:prstGeom>
           <a:solidFill>
-            <a:srgbClr val="F3EEE1"/>
+            <a:srgbClr val="1B2A24"/>
           </a:solidFill>
           <a:ln>
             <a:noFill/>
@@ -8004,7 +8016,7 @@
             <a:r>
               <a:rPr sz="2800" b="0">
                 <a:solidFill>
-                  <a:srgbClr val="0F2B23"/>
+                  <a:srgbClr val="F5F1E6"/>
                 </a:solidFill>
                 <a:latin typeface="Dela Gothic One"/>
                 <a:ea typeface="Dela Gothic One"/>
@@ -8048,7 +8060,7 @@
             <a:r>
               <a:rPr sz="1500" b="0">
                 <a:solidFill>
-                  <a:srgbClr val="A7BCB1"/>
+                  <a:srgbClr val="4E5F57"/>
                 </a:solidFill>
                 <a:latin typeface="Zen Kaku Gothic New"/>
                 <a:ea typeface="Zen Kaku Gothic New"/>
@@ -8092,7 +8104,7 @@
             <a:r>
               <a:rPr sz="869" b="0">
                 <a:solidFill>
-                  <a:srgbClr val="EE5A3C"/>
+                  <a:srgbClr val="C23B1E"/>
                 </a:solidFill>
                 <a:latin typeface="Zen Kaku Gothic New"/>
                 <a:ea typeface="Zen Kaku Gothic New"/>
@@ -8103,7 +8115,7 @@
             <a:r>
               <a:rPr sz="1450" b="0">
                 <a:solidFill>
-                  <a:srgbClr val="F3EEE1"/>
+                  <a:srgbClr val="1B2A24"/>
                 </a:solidFill>
                 <a:latin typeface="Zen Kaku Gothic New"/>
                 <a:ea typeface="Zen Kaku Gothic New"/>
@@ -8124,7 +8136,7 @@
             <a:r>
               <a:rPr sz="869" b="0">
                 <a:solidFill>
-                  <a:srgbClr val="EE5A3C"/>
+                  <a:srgbClr val="C23B1E"/>
                 </a:solidFill>
                 <a:latin typeface="Zen Kaku Gothic New"/>
                 <a:ea typeface="Zen Kaku Gothic New"/>
@@ -8135,7 +8147,7 @@
             <a:r>
               <a:rPr sz="1450" b="0">
                 <a:solidFill>
-                  <a:srgbClr val="F3EEE1"/>
+                  <a:srgbClr val="1B2A24"/>
                 </a:solidFill>
                 <a:latin typeface="Zen Kaku Gothic New"/>
                 <a:ea typeface="Zen Kaku Gothic New"/>
@@ -8156,7 +8168,7 @@
             <a:r>
               <a:rPr sz="869" b="0">
                 <a:solidFill>
-                  <a:srgbClr val="EE5A3C"/>
+                  <a:srgbClr val="C23B1E"/>
                 </a:solidFill>
                 <a:latin typeface="Zen Kaku Gothic New"/>
                 <a:ea typeface="Zen Kaku Gothic New"/>
@@ -8167,7 +8179,7 @@
             <a:r>
               <a:rPr sz="1450" b="0">
                 <a:solidFill>
-                  <a:srgbClr val="F3EEE1"/>
+                  <a:srgbClr val="1B2A24"/>
                 </a:solidFill>
                 <a:latin typeface="Zen Kaku Gothic New"/>
                 <a:ea typeface="Zen Kaku Gothic New"/>
@@ -8193,7 +8205,7 @@
             <a:avLst/>
           </a:prstGeom>
           <a:solidFill>
-            <a:srgbClr val="163A2F"/>
+            <a:srgbClr val="E3ECE5"/>
           </a:solidFill>
           <a:ln>
             <a:noFill/>
@@ -8237,7 +8249,7 @@
             <a:avLst/>
           </a:prstGeom>
           <a:solidFill>
-            <a:srgbClr val="EE5A3C"/>
+            <a:srgbClr val="C23B1E"/>
           </a:solidFill>
           <a:ln>
             <a:noFill/>
@@ -8299,7 +8311,7 @@
             <a:r>
               <a:rPr sz="1700" b="1">
                 <a:solidFill>
-                  <a:srgbClr val="F3EEE1"/>
+                  <a:srgbClr val="1B2A24"/>
                 </a:solidFill>
                 <a:latin typeface="Zen Kaku Gothic New"/>
                 <a:ea typeface="Zen Kaku Gothic New"/>
@@ -8343,7 +8355,7 @@
             <a:r>
               <a:rPr sz="1100" b="0">
                 <a:solidFill>
-                  <a:srgbClr val="A7BCB1"/>
+                  <a:srgbClr val="4E5F57"/>
                 </a:solidFill>
                 <a:latin typeface="Zen Kaku Gothic New"/>
                 <a:ea typeface="Zen Kaku Gothic New"/>
@@ -8354,7 +8366,7 @@
             <a:r>
               <a:rPr sz="1100" b="1">
                 <a:solidFill>
-                  <a:srgbClr val="A7BCB1"/>
+                  <a:srgbClr val="4E5F57"/>
                 </a:solidFill>
                 <a:latin typeface="Zen Kaku Gothic New"/>
                 <a:ea typeface="Zen Kaku Gothic New"/>
@@ -8379,7 +8391,7 @@
     <p:bg>
       <p:bgPr>
         <a:solidFill>
-          <a:srgbClr val="0F2B23"/>
+          <a:srgbClr val="F5F1E6"/>
         </a:solidFill>
         <a:effectLst/>
       </p:bgPr>
@@ -8424,7 +8436,7 @@
             <a:r>
               <a:rPr sz="1800" b="1">
                 <a:solidFill>
-                  <a:srgbClr val="A7BCB1"/>
+                  <a:srgbClr val="4E5F57"/>
                 </a:solidFill>
                 <a:latin typeface="Zen Kaku Gothic New"/>
                 <a:ea typeface="Zen Kaku Gothic New"/>
@@ -8435,7 +8447,7 @@
             <a:r>
               <a:rPr sz="4000" b="0">
                 <a:solidFill>
-                  <a:srgbClr val="EE5A3C"/>
+                  <a:srgbClr val="C23B1E"/>
                 </a:solidFill>
                 <a:latin typeface="Dela Gothic One"/>
                 <a:ea typeface="Dela Gothic One"/>
@@ -8479,7 +8491,7 @@
             <a:r>
               <a:rPr sz="1400" b="1">
                 <a:solidFill>
-                  <a:srgbClr val="A7BCB1"/>
+                  <a:srgbClr val="4E5F57"/>
                 </a:solidFill>
                 <a:latin typeface="Zen Kaku Gothic New"/>
                 <a:ea typeface="Zen Kaku Gothic New"/>
@@ -8505,10 +8517,12 @@
             <a:avLst/>
           </a:prstGeom>
           <a:solidFill>
-            <a:srgbClr val="F6F1E4"/>
+            <a:srgbClr val="FFFFFF"/>
           </a:solidFill>
-          <a:ln>
-            <a:noFill/>
+          <a:ln w="12700">
+            <a:solidFill>
+              <a:srgbClr val="C9C2AE"/>
+            </a:solidFill>
           </a:ln>
           <a:effectLst/>
         </p:spPr>
@@ -8573,7 +8587,7 @@
             <a:avLst/>
           </a:prstGeom>
           <a:solidFill>
-            <a:srgbClr val="F3EEE1"/>
+            <a:srgbClr val="1B2A24"/>
           </a:solidFill>
           <a:ln>
             <a:noFill/>
@@ -8635,7 +8649,7 @@
             <a:r>
               <a:rPr sz="2800" b="0">
                 <a:solidFill>
-                  <a:srgbClr val="0F2B23"/>
+                  <a:srgbClr val="F5F1E6"/>
                 </a:solidFill>
                 <a:latin typeface="Dela Gothic One"/>
                 <a:ea typeface="Dela Gothic One"/>
@@ -8679,7 +8693,7 @@
             <a:r>
               <a:rPr sz="1500" b="0">
                 <a:solidFill>
-                  <a:srgbClr val="A7BCB1"/>
+                  <a:srgbClr val="4E5F57"/>
                 </a:solidFill>
                 <a:latin typeface="Zen Kaku Gothic New"/>
                 <a:ea typeface="Zen Kaku Gothic New"/>
@@ -8723,7 +8737,7 @@
             <a:r>
               <a:rPr sz="869" b="0">
                 <a:solidFill>
-                  <a:srgbClr val="EE5A3C"/>
+                  <a:srgbClr val="C23B1E"/>
                 </a:solidFill>
                 <a:latin typeface="Zen Kaku Gothic New"/>
                 <a:ea typeface="Zen Kaku Gothic New"/>
@@ -8734,7 +8748,7 @@
             <a:r>
               <a:rPr sz="1450" b="0">
                 <a:solidFill>
-                  <a:srgbClr val="F3EEE1"/>
+                  <a:srgbClr val="1B2A24"/>
                 </a:solidFill>
                 <a:latin typeface="Zen Kaku Gothic New"/>
                 <a:ea typeface="Zen Kaku Gothic New"/>
@@ -8755,7 +8769,7 @@
             <a:r>
               <a:rPr sz="869" b="0">
                 <a:solidFill>
-                  <a:srgbClr val="EE5A3C"/>
+                  <a:srgbClr val="C23B1E"/>
                 </a:solidFill>
                 <a:latin typeface="Zen Kaku Gothic New"/>
                 <a:ea typeface="Zen Kaku Gothic New"/>
@@ -8766,7 +8780,7 @@
             <a:r>
               <a:rPr sz="1450" b="0">
                 <a:solidFill>
-                  <a:srgbClr val="F3EEE1"/>
+                  <a:srgbClr val="1B2A24"/>
                 </a:solidFill>
                 <a:latin typeface="Zen Kaku Gothic New"/>
                 <a:ea typeface="Zen Kaku Gothic New"/>
@@ -8792,7 +8806,7 @@
             <a:avLst/>
           </a:prstGeom>
           <a:solidFill>
-            <a:srgbClr val="163A2F"/>
+            <a:srgbClr val="E3ECE5"/>
           </a:solidFill>
           <a:ln>
             <a:noFill/>
@@ -8836,7 +8850,7 @@
             <a:avLst/>
           </a:prstGeom>
           <a:solidFill>
-            <a:srgbClr val="EE5A3C"/>
+            <a:srgbClr val="C23B1E"/>
           </a:solidFill>
           <a:ln>
             <a:noFill/>
@@ -8898,7 +8912,7 @@
             <a:r>
               <a:rPr sz="1700" b="1">
                 <a:solidFill>
-                  <a:srgbClr val="F3EEE1"/>
+                  <a:srgbClr val="1B2A24"/>
                 </a:solidFill>
                 <a:latin typeface="Zen Kaku Gothic New"/>
                 <a:ea typeface="Zen Kaku Gothic New"/>
@@ -8942,7 +8956,7 @@
             <a:r>
               <a:rPr sz="1100" b="0">
                 <a:solidFill>
-                  <a:srgbClr val="A7BCB1"/>
+                  <a:srgbClr val="4E5F57"/>
                 </a:solidFill>
                 <a:latin typeface="Zen Kaku Gothic New"/>
                 <a:ea typeface="Zen Kaku Gothic New"/>
@@ -8953,7 +8967,7 @@
             <a:r>
               <a:rPr sz="1100" b="1">
                 <a:solidFill>
-                  <a:srgbClr val="A7BCB1"/>
+                  <a:srgbClr val="4E5F57"/>
                 </a:solidFill>
                 <a:latin typeface="Zen Kaku Gothic New"/>
                 <a:ea typeface="Zen Kaku Gothic New"/>
@@ -8978,7 +8992,7 @@
     <p:bg>
       <p:bgPr>
         <a:solidFill>
-          <a:srgbClr val="0F2B23"/>
+          <a:srgbClr val="F5F1E6"/>
         </a:solidFill>
         <a:effectLst/>
       </p:bgPr>
@@ -9023,7 +9037,7 @@
             <a:r>
               <a:rPr sz="1800" b="1">
                 <a:solidFill>
-                  <a:srgbClr val="A7BCB1"/>
+                  <a:srgbClr val="4E5F57"/>
                 </a:solidFill>
                 <a:latin typeface="Zen Kaku Gothic New"/>
                 <a:ea typeface="Zen Kaku Gothic New"/>
@@ -9034,7 +9048,7 @@
             <a:r>
               <a:rPr sz="4000" b="0">
                 <a:solidFill>
-                  <a:srgbClr val="EE5A3C"/>
+                  <a:srgbClr val="C23B1E"/>
                 </a:solidFill>
                 <a:latin typeface="Dela Gothic One"/>
                 <a:ea typeface="Dela Gothic One"/>
@@ -9078,7 +9092,7 @@
             <a:r>
               <a:rPr sz="1400" b="1">
                 <a:solidFill>
-                  <a:srgbClr val="A7BCB1"/>
+                  <a:srgbClr val="4E5F57"/>
                 </a:solidFill>
                 <a:latin typeface="Zen Kaku Gothic New"/>
                 <a:ea typeface="Zen Kaku Gothic New"/>
@@ -9104,10 +9118,12 @@
             <a:avLst/>
           </a:prstGeom>
           <a:solidFill>
-            <a:srgbClr val="F6F1E4"/>
+            <a:srgbClr val="FFFFFF"/>
           </a:solidFill>
-          <a:ln>
-            <a:noFill/>
+          <a:ln w="12700">
+            <a:solidFill>
+              <a:srgbClr val="C9C2AE"/>
+            </a:solidFill>
           </a:ln>
           <a:effectLst/>
         </p:spPr>
@@ -9172,7 +9188,7 @@
             <a:avLst/>
           </a:prstGeom>
           <a:solidFill>
-            <a:srgbClr val="EE5A3C"/>
+            <a:srgbClr val="C23B1E"/>
           </a:solidFill>
           <a:ln>
             <a:noFill/>
@@ -9234,7 +9250,7 @@
             <a:r>
               <a:rPr sz="2800" b="0">
                 <a:solidFill>
-                  <a:srgbClr val="F3EEE1"/>
+                  <a:srgbClr val="FFFFFF"/>
                 </a:solidFill>
                 <a:latin typeface="Dela Gothic One"/>
                 <a:ea typeface="Dela Gothic One"/>
@@ -9278,7 +9294,7 @@
             <a:r>
               <a:rPr sz="1500" b="0">
                 <a:solidFill>
-                  <a:srgbClr val="A7BCB1"/>
+                  <a:srgbClr val="4E5F57"/>
                 </a:solidFill>
                 <a:latin typeface="Zen Kaku Gothic New"/>
                 <a:ea typeface="Zen Kaku Gothic New"/>
@@ -9322,7 +9338,7 @@
             <a:r>
               <a:rPr sz="869" b="0">
                 <a:solidFill>
-                  <a:srgbClr val="EE5A3C"/>
+                  <a:srgbClr val="C23B1E"/>
                 </a:solidFill>
                 <a:latin typeface="Zen Kaku Gothic New"/>
                 <a:ea typeface="Zen Kaku Gothic New"/>
@@ -9333,7 +9349,7 @@
             <a:r>
               <a:rPr sz="1450" b="0">
                 <a:solidFill>
-                  <a:srgbClr val="F3EEE1"/>
+                  <a:srgbClr val="1B2A24"/>
                 </a:solidFill>
                 <a:latin typeface="Zen Kaku Gothic New"/>
                 <a:ea typeface="Zen Kaku Gothic New"/>
@@ -9354,7 +9370,7 @@
             <a:r>
               <a:rPr sz="869" b="0">
                 <a:solidFill>
-                  <a:srgbClr val="EE5A3C"/>
+                  <a:srgbClr val="C23B1E"/>
                 </a:solidFill>
                 <a:latin typeface="Zen Kaku Gothic New"/>
                 <a:ea typeface="Zen Kaku Gothic New"/>
@@ -9365,7 +9381,7 @@
             <a:r>
               <a:rPr sz="1450" b="0">
                 <a:solidFill>
-                  <a:srgbClr val="F3EEE1"/>
+                  <a:srgbClr val="1B2A24"/>
                 </a:solidFill>
                 <a:latin typeface="Zen Kaku Gothic New"/>
                 <a:ea typeface="Zen Kaku Gothic New"/>
@@ -9386,7 +9402,7 @@
             <a:r>
               <a:rPr sz="869" b="0">
                 <a:solidFill>
-                  <a:srgbClr val="EE5A3C"/>
+                  <a:srgbClr val="C23B1E"/>
                 </a:solidFill>
                 <a:latin typeface="Zen Kaku Gothic New"/>
                 <a:ea typeface="Zen Kaku Gothic New"/>
@@ -9397,7 +9413,7 @@
             <a:r>
               <a:rPr sz="1450" b="0">
                 <a:solidFill>
-                  <a:srgbClr val="F3EEE1"/>
+                  <a:srgbClr val="1B2A24"/>
                 </a:solidFill>
                 <a:latin typeface="Zen Kaku Gothic New"/>
                 <a:ea typeface="Zen Kaku Gothic New"/>
@@ -9423,7 +9439,7 @@
             <a:avLst/>
           </a:prstGeom>
           <a:solidFill>
-            <a:srgbClr val="163A2F"/>
+            <a:srgbClr val="E3ECE5"/>
           </a:solidFill>
           <a:ln>
             <a:noFill/>
@@ -9467,7 +9483,7 @@
             <a:avLst/>
           </a:prstGeom>
           <a:solidFill>
-            <a:srgbClr val="EE5A3C"/>
+            <a:srgbClr val="C23B1E"/>
           </a:solidFill>
           <a:ln>
             <a:noFill/>
@@ -9529,7 +9545,7 @@
             <a:r>
               <a:rPr sz="1700" b="1">
                 <a:solidFill>
-                  <a:srgbClr val="F3EEE1"/>
+                  <a:srgbClr val="1B2A24"/>
                 </a:solidFill>
                 <a:latin typeface="Zen Kaku Gothic New"/>
                 <a:ea typeface="Zen Kaku Gothic New"/>
@@ -9573,7 +9589,7 @@
             <a:r>
               <a:rPr sz="1100" b="0">
                 <a:solidFill>
-                  <a:srgbClr val="A7BCB1"/>
+                  <a:srgbClr val="4E5F57"/>
                 </a:solidFill>
                 <a:latin typeface="Zen Kaku Gothic New"/>
                 <a:ea typeface="Zen Kaku Gothic New"/>
@@ -9584,7 +9600,7 @@
             <a:r>
               <a:rPr sz="1100" b="1">
                 <a:solidFill>
-                  <a:srgbClr val="A7BCB1"/>
+                  <a:srgbClr val="4E5F57"/>
                 </a:solidFill>
                 <a:latin typeface="Zen Kaku Gothic New"/>
                 <a:ea typeface="Zen Kaku Gothic New"/>
@@ -9609,7 +9625,7 @@
     <p:bg>
       <p:bgPr>
         <a:solidFill>
-          <a:srgbClr val="0F2B23"/>
+          <a:srgbClr val="F5F1E6"/>
         </a:solidFill>
         <a:effectLst/>
       </p:bgPr>
@@ -9654,7 +9670,7 @@
             <a:r>
               <a:rPr sz="4000" b="0">
                 <a:solidFill>
-                  <a:srgbClr val="EE5A3C"/>
+                  <a:srgbClr val="C23B1E"/>
                 </a:solidFill>
                 <a:latin typeface="Dela Gothic One"/>
                 <a:ea typeface="Dela Gothic One"/>
@@ -9698,7 +9714,7 @@
             <a:r>
               <a:rPr sz="4400" b="0">
                 <a:solidFill>
-                  <a:srgbClr val="F3EEE1"/>
+                  <a:srgbClr val="1B2A24"/>
                 </a:solidFill>
                 <a:latin typeface="Dela Gothic One"/>
                 <a:ea typeface="Dela Gothic One"/>
@@ -9719,7 +9735,7 @@
             <a:r>
               <a:rPr sz="4400" b="0">
                 <a:solidFill>
-                  <a:srgbClr val="F3EEE1"/>
+                  <a:srgbClr val="1B2A24"/>
                 </a:solidFill>
                 <a:latin typeface="Dela Gothic One"/>
                 <a:ea typeface="Dela Gothic One"/>
@@ -9740,7 +9756,7 @@
             <a:r>
               <a:rPr sz="4400" b="0">
                 <a:solidFill>
-                  <a:srgbClr val="EE5A3C"/>
+                  <a:srgbClr val="C23B1E"/>
                 </a:solidFill>
                 <a:latin typeface="Dela Gothic One"/>
                 <a:ea typeface="Dela Gothic One"/>
@@ -9766,7 +9782,7 @@
             <a:avLst/>
           </a:prstGeom>
           <a:solidFill>
-            <a:srgbClr val="2B5547"/>
+            <a:srgbClr val="C9C2AE"/>
           </a:solidFill>
           <a:ln>
             <a:noFill/>
@@ -9828,7 +9844,7 @@
             <a:r>
               <a:rPr sz="1700" b="0">
                 <a:solidFill>
-                  <a:srgbClr val="F3EEE1"/>
+                  <a:srgbClr val="1B2A24"/>
                 </a:solidFill>
                 <a:latin typeface="Zen Kaku Gothic New"/>
                 <a:ea typeface="Zen Kaku Gothic New"/>
@@ -9849,7 +9865,7 @@
             <a:r>
               <a:rPr sz="1700" b="0">
                 <a:solidFill>
-                  <a:srgbClr val="F3EEE1"/>
+                  <a:srgbClr val="1B2A24"/>
                 </a:solidFill>
                 <a:latin typeface="Zen Kaku Gothic New"/>
                 <a:ea typeface="Zen Kaku Gothic New"/>
@@ -9870,7 +9886,7 @@
             <a:r>
               <a:rPr sz="1700" b="0">
                 <a:solidFill>
-                  <a:srgbClr val="F3EEE1"/>
+                  <a:srgbClr val="1B2A24"/>
                 </a:solidFill>
                 <a:latin typeface="Zen Kaku Gothic New"/>
                 <a:ea typeface="Zen Kaku Gothic New"/>
@@ -9891,7 +9907,7 @@
             <a:r>
               <a:rPr sz="1700" b="1">
                 <a:solidFill>
-                  <a:srgbClr val="F3EEE1"/>
+                  <a:srgbClr val="1B2A24"/>
                 </a:solidFill>
                 <a:latin typeface="Zen Kaku Gothic New"/>
                 <a:ea typeface="Zen Kaku Gothic New"/>
@@ -9935,7 +9951,7 @@
             <a:r>
               <a:rPr sz="1100" b="0">
                 <a:solidFill>
-                  <a:srgbClr val="A7BCB1"/>
+                  <a:srgbClr val="4E5F57"/>
                 </a:solidFill>
                 <a:latin typeface="Zen Kaku Gothic New"/>
                 <a:ea typeface="Zen Kaku Gothic New"/>
@@ -9946,7 +9962,7 @@
             <a:r>
               <a:rPr sz="1100" b="1">
                 <a:solidFill>
-                  <a:srgbClr val="A7BCB1"/>
+                  <a:srgbClr val="4E5F57"/>
                 </a:solidFill>
                 <a:latin typeface="Zen Kaku Gothic New"/>
                 <a:ea typeface="Zen Kaku Gothic New"/>
@@ -9971,7 +9987,7 @@
     <p:bg>
       <p:bgPr>
         <a:solidFill>
-          <a:srgbClr val="0F2B23"/>
+          <a:srgbClr val="F5F1E6"/>
         </a:solidFill>
         <a:effectLst/>
       </p:bgPr>
@@ -10016,7 +10032,7 @@
             <a:r>
               <a:rPr sz="6400" b="0">
                 <a:solidFill>
-                  <a:srgbClr val="F3EEE1"/>
+                  <a:srgbClr val="1B2A24"/>
                 </a:solidFill>
                 <a:latin typeface="Dela Gothic One"/>
                 <a:ea typeface="Dela Gothic One"/>
@@ -10037,7 +10053,7 @@
             <a:r>
               <a:rPr sz="6400" b="0">
                 <a:solidFill>
-                  <a:srgbClr val="F3EEE1"/>
+                  <a:srgbClr val="1B2A24"/>
                 </a:solidFill>
                 <a:latin typeface="Dela Gothic One"/>
                 <a:ea typeface="Dela Gothic One"/>
@@ -10058,7 +10074,7 @@
             <a:r>
               <a:rPr sz="6400" b="0">
                 <a:solidFill>
-                  <a:srgbClr val="F3EEE1"/>
+                  <a:srgbClr val="1B2A24"/>
                 </a:solidFill>
                 <a:latin typeface="Dela Gothic One"/>
                 <a:ea typeface="Dela Gothic One"/>
@@ -10079,7 +10095,7 @@
             <a:r>
               <a:rPr sz="6400" b="0">
                 <a:solidFill>
-                  <a:srgbClr val="EE5A3C"/>
+                  <a:srgbClr val="C23B1E"/>
                 </a:solidFill>
                 <a:latin typeface="Dela Gothic One"/>
                 <a:ea typeface="Dela Gothic One"/>
@@ -10123,7 +10139,7 @@
             <a:r>
               <a:rPr sz="1700" b="0">
                 <a:solidFill>
-                  <a:srgbClr val="F3EEE1"/>
+                  <a:srgbClr val="1B2A24"/>
                 </a:solidFill>
                 <a:latin typeface="Zen Kaku Gothic New"/>
                 <a:ea typeface="Zen Kaku Gothic New"/>
@@ -10144,7 +10160,7 @@
             <a:r>
               <a:rPr sz="1700" b="0">
                 <a:solidFill>
-                  <a:srgbClr val="F3EEE1"/>
+                  <a:srgbClr val="1B2A24"/>
                 </a:solidFill>
                 <a:latin typeface="Zen Kaku Gothic New"/>
                 <a:ea typeface="Zen Kaku Gothic New"/>
@@ -10165,7 +10181,7 @@
             <a:r>
               <a:rPr sz="2400" b="1">
                 <a:solidFill>
-                  <a:srgbClr val="EE5A3C"/>
+                  <a:srgbClr val="C23B1E"/>
                 </a:solidFill>
                 <a:latin typeface="Zen Kaku Gothic New"/>
                 <a:ea typeface="Zen Kaku Gothic New"/>
@@ -10186,7 +10202,7 @@
             <a:r>
               <a:rPr sz="1700" b="1">
                 <a:solidFill>
-                  <a:srgbClr val="F3EEE1"/>
+                  <a:srgbClr val="1B2A24"/>
                 </a:solidFill>
                 <a:latin typeface="Zen Kaku Gothic New"/>
                 <a:ea typeface="Zen Kaku Gothic New"/>
@@ -10207,7 +10223,7 @@
             <a:r>
               <a:rPr sz="1700" b="1">
                 <a:solidFill>
-                  <a:srgbClr val="F3EEE1"/>
+                  <a:srgbClr val="1B2A24"/>
                 </a:solidFill>
                 <a:latin typeface="Zen Kaku Gothic New"/>
                 <a:ea typeface="Zen Kaku Gothic New"/>
@@ -10251,7 +10267,7 @@
             <a:r>
               <a:rPr sz="1100" b="0">
                 <a:solidFill>
-                  <a:srgbClr val="A7BCB1"/>
+                  <a:srgbClr val="4E5F57"/>
                 </a:solidFill>
                 <a:latin typeface="Zen Kaku Gothic New"/>
                 <a:ea typeface="Zen Kaku Gothic New"/>
@@ -10262,7 +10278,7 @@
             <a:r>
               <a:rPr sz="1100" b="1">
                 <a:solidFill>
-                  <a:srgbClr val="A7BCB1"/>
+                  <a:srgbClr val="4E5F57"/>
                 </a:solidFill>
                 <a:latin typeface="Zen Kaku Gothic New"/>
                 <a:ea typeface="Zen Kaku Gothic New"/>
@@ -10287,7 +10303,7 @@
     <p:bg>
       <p:bgPr>
         <a:solidFill>
-          <a:srgbClr val="0F2B23"/>
+          <a:srgbClr val="F5F1E6"/>
         </a:solidFill>
         <a:effectLst/>
       </p:bgPr>
@@ -10332,7 +10348,7 @@
             <a:r>
               <a:rPr sz="13000" b="0">
                 <a:solidFill>
-                  <a:srgbClr val="EE5A3C"/>
+                  <a:srgbClr val="C23B1E"/>
                 </a:solidFill>
                 <a:latin typeface="Dela Gothic One"/>
                 <a:ea typeface="Dela Gothic One"/>
@@ -10376,7 +10392,7 @@
             <a:r>
               <a:rPr sz="1800" b="0">
                 <a:solidFill>
-                  <a:srgbClr val="A7BCB1"/>
+                  <a:srgbClr val="4E5F57"/>
                 </a:solidFill>
                 <a:latin typeface="Zen Kaku Gothic New"/>
                 <a:ea typeface="Zen Kaku Gothic New"/>
@@ -10402,7 +10418,7 @@
             <a:avLst/>
           </a:prstGeom>
           <a:solidFill>
-            <a:srgbClr val="163A2F"/>
+            <a:srgbClr val="E3ECE5"/>
           </a:solidFill>
           <a:ln>
             <a:noFill/>
@@ -10446,7 +10462,7 @@
             <a:avLst/>
           </a:prstGeom>
           <a:solidFill>
-            <a:srgbClr val="EE5A3C"/>
+            <a:srgbClr val="C23B1E"/>
           </a:solidFill>
           <a:ln>
             <a:noFill/>
@@ -10508,7 +10524,7 @@
             <a:r>
               <a:rPr sz="2800" b="0">
                 <a:solidFill>
-                  <a:srgbClr val="EE5A3C"/>
+                  <a:srgbClr val="C23B1E"/>
                 </a:solidFill>
                 <a:latin typeface="Dela Gothic One"/>
                 <a:ea typeface="Dela Gothic One"/>
@@ -10519,7 +10535,7 @@
             <a:r>
               <a:rPr sz="2400" b="0">
                 <a:solidFill>
-                  <a:srgbClr val="F3EEE1"/>
+                  <a:srgbClr val="1B2A24"/>
                 </a:solidFill>
                 <a:latin typeface="Dela Gothic One"/>
                 <a:ea typeface="Dela Gothic One"/>
@@ -10545,7 +10561,7 @@
             <a:avLst/>
           </a:prstGeom>
           <a:solidFill>
-            <a:srgbClr val="163A2F"/>
+            <a:srgbClr val="E3ECE5"/>
           </a:solidFill>
           <a:ln>
             <a:noFill/>
@@ -10589,7 +10605,7 @@
             <a:avLst/>
           </a:prstGeom>
           <a:solidFill>
-            <a:srgbClr val="EE5A3C"/>
+            <a:srgbClr val="C23B1E"/>
           </a:solidFill>
           <a:ln>
             <a:noFill/>
@@ -10651,7 +10667,7 @@
             <a:r>
               <a:rPr sz="2800" b="0">
                 <a:solidFill>
-                  <a:srgbClr val="EE5A3C"/>
+                  <a:srgbClr val="C23B1E"/>
                 </a:solidFill>
                 <a:latin typeface="Dela Gothic One"/>
                 <a:ea typeface="Dela Gothic One"/>
@@ -10662,7 +10678,7 @@
             <a:r>
               <a:rPr sz="2400" b="0">
                 <a:solidFill>
-                  <a:srgbClr val="F3EEE1"/>
+                  <a:srgbClr val="1B2A24"/>
                 </a:solidFill>
                 <a:latin typeface="Dela Gothic One"/>
                 <a:ea typeface="Dela Gothic One"/>
@@ -10706,7 +10722,7 @@
             <a:r>
               <a:rPr sz="2600" b="0">
                 <a:solidFill>
-                  <a:srgbClr val="A7BCB1"/>
+                  <a:srgbClr val="4E5F57"/>
                 </a:solidFill>
                 <a:latin typeface="Dela Gothic One"/>
                 <a:ea typeface="Dela Gothic One"/>
@@ -10750,7 +10766,7 @@
             <a:r>
               <a:rPr sz="1100" b="0">
                 <a:solidFill>
-                  <a:srgbClr val="A7BCB1"/>
+                  <a:srgbClr val="4E5F57"/>
                 </a:solidFill>
                 <a:latin typeface="Zen Kaku Gothic New"/>
                 <a:ea typeface="Zen Kaku Gothic New"/>
@@ -10761,7 +10777,7 @@
             <a:r>
               <a:rPr sz="1100" b="1">
                 <a:solidFill>
-                  <a:srgbClr val="A7BCB1"/>
+                  <a:srgbClr val="4E5F57"/>
                 </a:solidFill>
                 <a:latin typeface="Zen Kaku Gothic New"/>
                 <a:ea typeface="Zen Kaku Gothic New"/>
@@ -10786,7 +10802,7 @@
     <p:bg>
       <p:bgPr>
         <a:solidFill>
-          <a:srgbClr val="0F2B23"/>
+          <a:srgbClr val="F5F1E6"/>
         </a:solidFill>
         <a:effectLst/>
       </p:bgPr>
@@ -10831,7 +10847,7 @@
             <a:r>
               <a:rPr sz="4000" b="0">
                 <a:solidFill>
-                  <a:srgbClr val="EE5A3C"/>
+                  <a:srgbClr val="C23B1E"/>
                 </a:solidFill>
                 <a:latin typeface="Dela Gothic One"/>
                 <a:ea typeface="Dela Gothic One"/>
@@ -10842,7 +10858,7 @@
             <a:r>
               <a:rPr sz="4000" b="0">
                 <a:solidFill>
-                  <a:srgbClr val="F3EEE1"/>
+                  <a:srgbClr val="1B2A24"/>
                 </a:solidFill>
                 <a:latin typeface="Dela Gothic One"/>
                 <a:ea typeface="Dela Gothic One"/>
@@ -10886,7 +10902,7 @@
             <a:r>
               <a:rPr sz="1500" b="0">
                 <a:solidFill>
-                  <a:srgbClr val="A7BCB1"/>
+                  <a:srgbClr val="4E5F57"/>
                 </a:solidFill>
                 <a:latin typeface="Zen Kaku Gothic New"/>
                 <a:ea typeface="Zen Kaku Gothic New"/>
@@ -10912,7 +10928,7 @@
             <a:avLst/>
           </a:prstGeom>
           <a:solidFill>
-            <a:srgbClr val="2B5547"/>
+            <a:srgbClr val="C9C2AE"/>
           </a:solidFill>
           <a:ln>
             <a:noFill/>
@@ -10974,7 +10990,7 @@
             <a:r>
               <a:rPr sz="2100" b="1">
                 <a:solidFill>
-                  <a:srgbClr val="F3EEE1"/>
+                  <a:srgbClr val="1B2A24"/>
                 </a:solidFill>
                 <a:latin typeface="Zen Kaku Gothic New"/>
                 <a:ea typeface="Zen Kaku Gothic New"/>
@@ -10995,7 +11011,7 @@
             <a:r>
               <a:rPr sz="1400" b="0">
                 <a:solidFill>
-                  <a:srgbClr val="A7BCB1"/>
+                  <a:srgbClr val="4E5F57"/>
                 </a:solidFill>
                 <a:latin typeface="Zen Kaku Gothic New"/>
                 <a:ea typeface="Zen Kaku Gothic New"/>
@@ -11039,7 +11055,7 @@
             <a:r>
               <a:rPr sz="2100" b="1">
                 <a:solidFill>
-                  <a:srgbClr val="EE5A3C"/>
+                  <a:srgbClr val="C23B1E"/>
                 </a:solidFill>
                 <a:latin typeface="Zen Kaku Gothic New"/>
                 <a:ea typeface="Zen Kaku Gothic New"/>
@@ -11050,7 +11066,7 @@
             <a:r>
               <a:rPr sz="1900" b="1">
                 <a:solidFill>
-                  <a:srgbClr val="EE5A3C"/>
+                  <a:srgbClr val="C23B1E"/>
                 </a:solidFill>
                 <a:latin typeface="Zen Kaku Gothic New"/>
                 <a:ea typeface="Zen Kaku Gothic New"/>
@@ -11076,7 +11092,7 @@
             <a:avLst/>
           </a:prstGeom>
           <a:solidFill>
-            <a:srgbClr val="2B5547"/>
+            <a:srgbClr val="C9C2AE"/>
           </a:solidFill>
           <a:ln>
             <a:noFill/>
@@ -11138,7 +11154,7 @@
             <a:r>
               <a:rPr sz="2100" b="1">
                 <a:solidFill>
-                  <a:srgbClr val="F3EEE1"/>
+                  <a:srgbClr val="1B2A24"/>
                 </a:solidFill>
                 <a:latin typeface="Zen Kaku Gothic New"/>
                 <a:ea typeface="Zen Kaku Gothic New"/>
@@ -11182,7 +11198,7 @@
             <a:r>
               <a:rPr sz="2100" b="1">
                 <a:solidFill>
-                  <a:srgbClr val="EE5A3C"/>
+                  <a:srgbClr val="C23B1E"/>
                 </a:solidFill>
                 <a:latin typeface="Zen Kaku Gothic New"/>
                 <a:ea typeface="Zen Kaku Gothic New"/>
@@ -11193,7 +11209,7 @@
             <a:r>
               <a:rPr sz="1900" b="1">
                 <a:solidFill>
-                  <a:srgbClr val="EE5A3C"/>
+                  <a:srgbClr val="C23B1E"/>
                 </a:solidFill>
                 <a:latin typeface="Zen Kaku Gothic New"/>
                 <a:ea typeface="Zen Kaku Gothic New"/>
@@ -11219,7 +11235,7 @@
             <a:avLst/>
           </a:prstGeom>
           <a:solidFill>
-            <a:srgbClr val="F3EEE1"/>
+            <a:srgbClr val="E3ECE5"/>
           </a:solidFill>
           <a:ln>
             <a:noFill/>
@@ -11250,7 +11266,51 @@
       </p:sp>
       <p:sp>
         <p:nvSpPr>
-          <p:cNvPr id="11" name="TextBox 10"/>
+          <p:cNvPr id="11" name="Rectangle 10"/>
+          <p:cNvSpPr/>
+          <p:nvPr/>
+        </p:nvSpPr>
+        <p:spPr>
+          <a:xfrm>
+            <a:off x="822960" y="4754880"/>
+            <a:ext cx="91440" cy="1325880"/>
+          </a:xfrm>
+          <a:prstGeom prst="rect">
+            <a:avLst/>
+          </a:prstGeom>
+          <a:solidFill>
+            <a:srgbClr val="C23B1E"/>
+          </a:solidFill>
+          <a:ln>
+            <a:noFill/>
+          </a:ln>
+          <a:effectLst/>
+        </p:spPr>
+        <p:style>
+          <a:lnRef idx="1">
+            <a:schemeClr val="accent1"/>
+          </a:lnRef>
+          <a:fillRef idx="3">
+            <a:schemeClr val="accent1"/>
+          </a:fillRef>
+          <a:effectRef idx="2">
+            <a:schemeClr val="accent1"/>
+          </a:effectRef>
+          <a:fontRef idx="minor">
+            <a:schemeClr val="lt1"/>
+          </a:fontRef>
+        </p:style>
+        <p:txBody>
+          <a:bodyPr rtlCol="0" anchor="ctr"/>
+          <a:lstStyle/>
+          <a:p>
+            <a:pPr algn="ctr"/>
+          </a:p>
+        </p:txBody>
+      </p:sp>
+      <p:sp>
+        <p:nvSpPr>
+          <p:cNvPr id="12" name="TextBox 11"/>
           <p:cNvSpPr txBox="1"/>
           <p:nvPr/>
         </p:nvSpPr>
@@ -11281,7 +11341,7 @@
             <a:r>
               <a:rPr sz="2600" b="0">
                 <a:solidFill>
-                  <a:srgbClr val="EE5A3C"/>
+                  <a:srgbClr val="C23B1E"/>
                 </a:solidFill>
                 <a:latin typeface="Dela Gothic One"/>
                 <a:ea typeface="Dela Gothic One"/>
@@ -11294,7 +11354,7 @@
       </p:sp>
       <p:sp>
         <p:nvSpPr>
-          <p:cNvPr id="12" name="TextBox 11"/>
+          <p:cNvPr id="13" name="TextBox 12"/>
           <p:cNvSpPr txBox="1"/>
           <p:nvPr/>
         </p:nvSpPr>
@@ -11325,7 +11385,7 @@
             <a:r>
               <a:rPr sz="1700" b="0">
                 <a:solidFill>
-                  <a:srgbClr val="0F2B23"/>
+                  <a:srgbClr val="1B2A24"/>
                 </a:solidFill>
                 <a:latin typeface="Zen Kaku Gothic New"/>
                 <a:ea typeface="Zen Kaku Gothic New"/>
@@ -11346,7 +11406,7 @@
             <a:r>
               <a:rPr sz="2000" b="1">
                 <a:solidFill>
-                  <a:srgbClr val="EE5A3C"/>
+                  <a:srgbClr val="C23B1E"/>
                 </a:solidFill>
                 <a:latin typeface="Zen Kaku Gothic New"/>
                 <a:ea typeface="Zen Kaku Gothic New"/>
@@ -11359,7 +11419,7 @@
       </p:sp>
       <p:sp>
         <p:nvSpPr>
-          <p:cNvPr id="13" name="TextBox 12"/>
+          <p:cNvPr id="14" name="TextBox 13"/>
           <p:cNvSpPr txBox="1"/>
           <p:nvPr/>
         </p:nvSpPr>
@@ -11390,7 +11450,7 @@
             <a:r>
               <a:rPr sz="1200" b="0">
                 <a:solidFill>
-                  <a:srgbClr val="A7BCB1"/>
+                  <a:srgbClr val="4E5F57"/>
                 </a:solidFill>
                 <a:latin typeface="Zen Kaku Gothic New"/>
                 <a:ea typeface="Zen Kaku Gothic New"/>
@@ -11403,7 +11463,7 @@
       </p:sp>
       <p:sp>
         <p:nvSpPr>
-          <p:cNvPr id="14" name="TextBox 13"/>
+          <p:cNvPr id="15" name="TextBox 14"/>
           <p:cNvSpPr txBox="1"/>
           <p:nvPr/>
         </p:nvSpPr>
@@ -11434,7 +11494,7 @@
             <a:r>
               <a:rPr sz="1100" b="0">
                 <a:solidFill>
-                  <a:srgbClr val="A7BCB1"/>
+                  <a:srgbClr val="4E5F57"/>
                 </a:solidFill>
                 <a:latin typeface="Zen Kaku Gothic New"/>
                 <a:ea typeface="Zen Kaku Gothic New"/>
@@ -11445,7 +11505,7 @@
             <a:r>
               <a:rPr sz="1100" b="1">
                 <a:solidFill>
-                  <a:srgbClr val="A7BCB1"/>
+                  <a:srgbClr val="4E5F57"/>
                 </a:solidFill>
                 <a:latin typeface="Zen Kaku Gothic New"/>
                 <a:ea typeface="Zen Kaku Gothic New"/>
@@ -11470,7 +11530,7 @@
     <p:bg>
       <p:bgPr>
         <a:solidFill>
-          <a:srgbClr val="0F2B23"/>
+          <a:srgbClr val="F5F1E6"/>
         </a:solidFill>
         <a:effectLst/>
       </p:bgPr>
@@ -11515,7 +11575,7 @@
             <a:r>
               <a:rPr sz="4000" b="0">
                 <a:solidFill>
-                  <a:srgbClr val="EE5A3C"/>
+                  <a:srgbClr val="C23B1E"/>
                 </a:solidFill>
                 <a:latin typeface="Dela Gothic One"/>
                 <a:ea typeface="Dela Gothic One"/>
@@ -11526,7 +11586,7 @@
             <a:r>
               <a:rPr sz="4000" b="0">
                 <a:solidFill>
-                  <a:srgbClr val="F3EEE1"/>
+                  <a:srgbClr val="1B2A24"/>
                 </a:solidFill>
                 <a:latin typeface="Dela Gothic One"/>
                 <a:ea typeface="Dela Gothic One"/>
@@ -11570,7 +11630,7 @@
             <a:r>
               <a:rPr sz="1500" b="0">
                 <a:solidFill>
-                  <a:srgbClr val="A7BCB1"/>
+                  <a:srgbClr val="4E5F57"/>
                 </a:solidFill>
                 <a:latin typeface="Zen Kaku Gothic New"/>
                 <a:ea typeface="Zen Kaku Gothic New"/>
@@ -11596,7 +11656,7 @@
             <a:avLst/>
           </a:prstGeom>
           <a:solidFill>
-            <a:srgbClr val="2B5547"/>
+            <a:srgbClr val="C9C2AE"/>
           </a:solidFill>
           <a:ln>
             <a:noFill/>
@@ -11658,7 +11718,7 @@
             <a:r>
               <a:rPr sz="2100" b="1">
                 <a:solidFill>
-                  <a:srgbClr val="F3EEE1"/>
+                  <a:srgbClr val="1B2A24"/>
                 </a:solidFill>
                 <a:latin typeface="Zen Kaku Gothic New"/>
                 <a:ea typeface="Zen Kaku Gothic New"/>
@@ -11702,7 +11762,7 @@
             <a:r>
               <a:rPr sz="2100" b="1">
                 <a:solidFill>
-                  <a:srgbClr val="EE5A3C"/>
+                  <a:srgbClr val="C23B1E"/>
                 </a:solidFill>
                 <a:latin typeface="Zen Kaku Gothic New"/>
                 <a:ea typeface="Zen Kaku Gothic New"/>
@@ -11713,7 +11773,7 @@
             <a:r>
               <a:rPr sz="1900" b="1">
                 <a:solidFill>
-                  <a:srgbClr val="EE5A3C"/>
+                  <a:srgbClr val="C23B1E"/>
                 </a:solidFill>
                 <a:latin typeface="Zen Kaku Gothic New"/>
                 <a:ea typeface="Zen Kaku Gothic New"/>
@@ -11739,7 +11799,7 @@
             <a:avLst/>
           </a:prstGeom>
           <a:solidFill>
-            <a:srgbClr val="2B5547"/>
+            <a:srgbClr val="C9C2AE"/>
           </a:solidFill>
           <a:ln>
             <a:noFill/>
@@ -11801,7 +11861,7 @@
             <a:r>
               <a:rPr sz="2100" b="1">
                 <a:solidFill>
-                  <a:srgbClr val="F3EEE1"/>
+                  <a:srgbClr val="1B2A24"/>
                 </a:solidFill>
                 <a:latin typeface="Zen Kaku Gothic New"/>
                 <a:ea typeface="Zen Kaku Gothic New"/>
@@ -11822,7 +11882,7 @@
             <a:r>
               <a:rPr sz="1400" b="0">
                 <a:solidFill>
-                  <a:srgbClr val="A7BCB1"/>
+                  <a:srgbClr val="4E5F57"/>
                 </a:solidFill>
                 <a:latin typeface="Zen Kaku Gothic New"/>
                 <a:ea typeface="Zen Kaku Gothic New"/>
@@ -11866,7 +11926,7 @@
             <a:r>
               <a:rPr sz="2100" b="1">
                 <a:solidFill>
-                  <a:srgbClr val="EE5A3C"/>
+                  <a:srgbClr val="C23B1E"/>
                 </a:solidFill>
                 <a:latin typeface="Zen Kaku Gothic New"/>
                 <a:ea typeface="Zen Kaku Gothic New"/>
@@ -11877,7 +11937,7 @@
             <a:r>
               <a:rPr sz="1900" b="1">
                 <a:solidFill>
-                  <a:srgbClr val="EE5A3C"/>
+                  <a:srgbClr val="C23B1E"/>
                 </a:solidFill>
                 <a:latin typeface="Zen Kaku Gothic New"/>
                 <a:ea typeface="Zen Kaku Gothic New"/>
@@ -11903,7 +11963,7 @@
             <a:avLst/>
           </a:prstGeom>
           <a:solidFill>
-            <a:srgbClr val="F3EEE1"/>
+            <a:srgbClr val="E3ECE5"/>
           </a:solidFill>
           <a:ln>
             <a:noFill/>
@@ -11934,7 +11994,51 @@
       </p:sp>
       <p:sp>
         <p:nvSpPr>
-          <p:cNvPr id="11" name="TextBox 10"/>
+          <p:cNvPr id="11" name="Rectangle 10"/>
+          <p:cNvSpPr/>
+          <p:nvPr/>
+        </p:nvSpPr>
+        <p:spPr>
+          <a:xfrm>
+            <a:off x="822960" y="4754880"/>
+            <a:ext cx="91440" cy="1325880"/>
+          </a:xfrm>
+          <a:prstGeom prst="rect">
+            <a:avLst/>
+          </a:prstGeom>
+          <a:solidFill>
+            <a:srgbClr val="C23B1E"/>
+          </a:solidFill>
+          <a:ln>
+            <a:noFill/>
+          </a:ln>
+          <a:effectLst/>
+        </p:spPr>
+        <p:style>
+          <a:lnRef idx="1">
+            <a:schemeClr val="accent1"/>
+          </a:lnRef>
+          <a:fillRef idx="3">
+            <a:schemeClr val="accent1"/>
+          </a:fillRef>
+          <a:effectRef idx="2">
+            <a:schemeClr val="accent1"/>
+          </a:effectRef>
+          <a:fontRef idx="minor">
+            <a:schemeClr val="lt1"/>
+          </a:fontRef>
+        </p:style>
+        <p:txBody>
+          <a:bodyPr rtlCol="0" anchor="ctr"/>
+          <a:lstStyle/>
+          <a:p>
+            <a:pPr algn="ctr"/>
+          </a:p>
+        </p:txBody>
+      </p:sp>
+      <p:sp>
+        <p:nvSpPr>
+          <p:cNvPr id="12" name="TextBox 11"/>
           <p:cNvSpPr txBox="1"/>
           <p:nvPr/>
         </p:nvSpPr>
@@ -11965,7 +12069,7 @@
             <a:r>
               <a:rPr sz="2600" b="0">
                 <a:solidFill>
-                  <a:srgbClr val="EE5A3C"/>
+                  <a:srgbClr val="C23B1E"/>
                 </a:solidFill>
                 <a:latin typeface="Dela Gothic One"/>
                 <a:ea typeface="Dela Gothic One"/>
@@ -11978,7 +12082,7 @@
       </p:sp>
       <p:sp>
         <p:nvSpPr>
-          <p:cNvPr id="12" name="TextBox 11"/>
+          <p:cNvPr id="13" name="TextBox 12"/>
           <p:cNvSpPr txBox="1"/>
           <p:nvPr/>
         </p:nvSpPr>
@@ -12009,7 +12113,7 @@
             <a:r>
               <a:rPr sz="1700" b="0">
                 <a:solidFill>
-                  <a:srgbClr val="0F2B23"/>
+                  <a:srgbClr val="1B2A24"/>
                 </a:solidFill>
                 <a:latin typeface="Zen Kaku Gothic New"/>
                 <a:ea typeface="Zen Kaku Gothic New"/>
@@ -12030,7 +12134,7 @@
             <a:r>
               <a:rPr sz="2200" b="1">
                 <a:solidFill>
-                  <a:srgbClr val="EE5A3C"/>
+                  <a:srgbClr val="C23B1E"/>
                 </a:solidFill>
                 <a:latin typeface="Zen Kaku Gothic New"/>
                 <a:ea typeface="Zen Kaku Gothic New"/>
@@ -12043,7 +12147,7 @@
       </p:sp>
       <p:sp>
         <p:nvSpPr>
-          <p:cNvPr id="13" name="TextBox 12"/>
+          <p:cNvPr id="14" name="TextBox 13"/>
           <p:cNvSpPr txBox="1"/>
           <p:nvPr/>
         </p:nvSpPr>
@@ -12074,7 +12178,7 @@
             <a:r>
               <a:rPr sz="1100" b="0">
                 <a:solidFill>
-                  <a:srgbClr val="A7BCB1"/>
+                  <a:srgbClr val="4E5F57"/>
                 </a:solidFill>
                 <a:latin typeface="Zen Kaku Gothic New"/>
                 <a:ea typeface="Zen Kaku Gothic New"/>
@@ -12085,7 +12189,7 @@
             <a:r>
               <a:rPr sz="1100" b="1">
                 <a:solidFill>
-                  <a:srgbClr val="A7BCB1"/>
+                  <a:srgbClr val="4E5F57"/>
                 </a:solidFill>
                 <a:latin typeface="Zen Kaku Gothic New"/>
                 <a:ea typeface="Zen Kaku Gothic New"/>
@@ -12110,7 +12214,7 @@
     <p:bg>
       <p:bgPr>
         <a:solidFill>
-          <a:srgbClr val="0F2B23"/>
+          <a:srgbClr val="F5F1E6"/>
         </a:solidFill>
         <a:effectLst/>
       </p:bgPr>
@@ -12155,7 +12259,7 @@
             <a:r>
               <a:rPr sz="4000" b="0">
                 <a:solidFill>
-                  <a:srgbClr val="EE5A3C"/>
+                  <a:srgbClr val="C23B1E"/>
                 </a:solidFill>
                 <a:latin typeface="Dela Gothic One"/>
                 <a:ea typeface="Dela Gothic One"/>
@@ -12199,7 +12303,7 @@
             <a:r>
               <a:rPr sz="1900" b="0">
                 <a:solidFill>
-                  <a:srgbClr val="A7BCB1"/>
+                  <a:srgbClr val="4E5F57"/>
                 </a:solidFill>
                 <a:latin typeface="Zen Kaku Gothic New"/>
                 <a:ea typeface="Zen Kaku Gothic New"/>
@@ -12220,7 +12324,7 @@
             <a:r>
               <a:rPr sz="2600" b="1">
                 <a:solidFill>
-                  <a:srgbClr val="F3EEE1"/>
+                  <a:srgbClr val="1B2A24"/>
                 </a:solidFill>
                 <a:latin typeface="Zen Kaku Gothic New"/>
                 <a:ea typeface="Zen Kaku Gothic New"/>
@@ -12241,7 +12345,7 @@
             <a:r>
               <a:rPr sz="1800" b="0">
                 <a:solidFill>
-                  <a:srgbClr val="F3EEE1"/>
+                  <a:srgbClr val="1B2A24"/>
                 </a:solidFill>
                 <a:latin typeface="Zen Kaku Gothic New"/>
                 <a:ea typeface="Zen Kaku Gothic New"/>
@@ -12262,7 +12366,7 @@
             <a:r>
               <a:rPr sz="1600" b="0">
                 <a:solidFill>
-                  <a:srgbClr val="A7BCB1"/>
+                  <a:srgbClr val="4E5F57"/>
                 </a:solidFill>
                 <a:latin typeface="Zen Kaku Gothic New"/>
                 <a:ea typeface="Zen Kaku Gothic New"/>
@@ -12288,7 +12392,7 @@
             <a:avLst/>
           </a:prstGeom>
           <a:solidFill>
-            <a:srgbClr val="163A2F"/>
+            <a:srgbClr val="E3ECE5"/>
           </a:solidFill>
           <a:ln>
             <a:noFill/>
@@ -12350,7 +12454,7 @@
             <a:r>
               <a:rPr sz="1600" b="0">
                 <a:solidFill>
-                  <a:srgbClr val="F3EEE1"/>
+                  <a:srgbClr val="1B2A24"/>
                 </a:solidFill>
                 <a:latin typeface="Zen Kaku Gothic New"/>
                 <a:ea typeface="Zen Kaku Gothic New"/>
@@ -12371,7 +12475,7 @@
             <a:r>
               <a:rPr sz="2000" b="1">
                 <a:solidFill>
-                  <a:srgbClr val="EE5A3C"/>
+                  <a:srgbClr val="C23B1E"/>
                 </a:solidFill>
                 <a:latin typeface="Zen Kaku Gothic New"/>
                 <a:ea typeface="Zen Kaku Gothic New"/>
@@ -12415,7 +12519,7 @@
             <a:r>
               <a:rPr sz="2600" b="0">
                 <a:solidFill>
-                  <a:srgbClr val="A7BCB1"/>
+                  <a:srgbClr val="4E5F57"/>
                 </a:solidFill>
                 <a:latin typeface="Dela Gothic One"/>
                 <a:ea typeface="Dela Gothic One"/>
@@ -12436,7 +12540,7 @@
             <a:r>
               <a:rPr sz="4800" b="0">
                 <a:solidFill>
-                  <a:srgbClr val="EE5A3C"/>
+                  <a:srgbClr val="C23B1E"/>
                 </a:solidFill>
                 <a:latin typeface="Dela Gothic One"/>
                 <a:ea typeface="Dela Gothic One"/>
@@ -12480,7 +12584,7 @@
             <a:r>
               <a:rPr sz="1100" b="0">
                 <a:solidFill>
-                  <a:srgbClr val="A7BCB1"/>
+                  <a:srgbClr val="4E5F57"/>
                 </a:solidFill>
                 <a:latin typeface="Zen Kaku Gothic New"/>
                 <a:ea typeface="Zen Kaku Gothic New"/>
@@ -12491,7 +12595,7 @@
             <a:r>
               <a:rPr sz="1100" b="1">
                 <a:solidFill>
-                  <a:srgbClr val="A7BCB1"/>
+                  <a:srgbClr val="4E5F57"/>
                 </a:solidFill>
                 <a:latin typeface="Zen Kaku Gothic New"/>
                 <a:ea typeface="Zen Kaku Gothic New"/>
@@ -12516,7 +12620,7 @@
     <p:bg>
       <p:bgPr>
         <a:solidFill>
-          <a:srgbClr val="0F2B23"/>
+          <a:srgbClr val="F5F1E6"/>
         </a:solidFill>
         <a:effectLst/>
       </p:bgPr>
@@ -12561,7 +12665,7 @@
             <a:r>
               <a:rPr sz="4000" b="0">
                 <a:solidFill>
-                  <a:srgbClr val="EE5A3C"/>
+                  <a:srgbClr val="C23B1E"/>
                 </a:solidFill>
                 <a:latin typeface="Dela Gothic One"/>
                 <a:ea typeface="Dela Gothic One"/>
@@ -12605,7 +12709,7 @@
             <a:r>
               <a:rPr sz="1600" b="0">
                 <a:solidFill>
-                  <a:srgbClr val="A7BCB1"/>
+                  <a:srgbClr val="4E5F57"/>
                 </a:solidFill>
                 <a:latin typeface="Zen Kaku Gothic New"/>
                 <a:ea typeface="Zen Kaku Gothic New"/>
@@ -12631,7 +12735,7 @@
             <a:avLst/>
           </a:prstGeom>
           <a:solidFill>
-            <a:srgbClr val="EE5A3C"/>
+            <a:srgbClr val="C23B1E"/>
           </a:solidFill>
           <a:ln>
             <a:noFill/>
@@ -12693,7 +12797,7 @@
             <a:r>
               <a:rPr sz="2600" b="0">
                 <a:solidFill>
-                  <a:srgbClr val="F3EEE1"/>
+                  <a:srgbClr val="FFFFFF"/>
                 </a:solidFill>
                 <a:latin typeface="Dela Gothic One"/>
                 <a:ea typeface="Dela Gothic One"/>
@@ -12719,7 +12823,7 @@
             <a:avLst/>
           </a:prstGeom>
           <a:solidFill>
-            <a:srgbClr val="163A2F"/>
+            <a:srgbClr val="E3ECE5"/>
           </a:solidFill>
           <a:ln>
             <a:noFill/>
@@ -12781,7 +12885,7 @@
             <a:r>
               <a:rPr sz="1080" b="0">
                 <a:solidFill>
-                  <a:srgbClr val="EE5A3C"/>
+                  <a:srgbClr val="C23B1E"/>
                 </a:solidFill>
                 <a:latin typeface="Zen Kaku Gothic New"/>
                 <a:ea typeface="Zen Kaku Gothic New"/>
@@ -12792,7 +12896,7 @@
             <a:r>
               <a:rPr sz="1800" b="0">
                 <a:solidFill>
-                  <a:srgbClr val="F3EEE1"/>
+                  <a:srgbClr val="1B2A24"/>
                 </a:solidFill>
                 <a:latin typeface="Zen Kaku Gothic New"/>
                 <a:ea typeface="Zen Kaku Gothic New"/>
@@ -12813,7 +12917,7 @@
             <a:r>
               <a:rPr sz="1080" b="0">
                 <a:solidFill>
-                  <a:srgbClr val="EE5A3C"/>
+                  <a:srgbClr val="C23B1E"/>
                 </a:solidFill>
                 <a:latin typeface="Zen Kaku Gothic New"/>
                 <a:ea typeface="Zen Kaku Gothic New"/>
@@ -12824,7 +12928,7 @@
             <a:r>
               <a:rPr sz="1800" b="0">
                 <a:solidFill>
-                  <a:srgbClr val="F3EEE1"/>
+                  <a:srgbClr val="1B2A24"/>
                 </a:solidFill>
                 <a:latin typeface="Zen Kaku Gothic New"/>
                 <a:ea typeface="Zen Kaku Gothic New"/>
@@ -12850,7 +12954,7 @@
             <a:avLst/>
           </a:prstGeom>
           <a:solidFill>
-            <a:srgbClr val="F3EEE1"/>
+            <a:srgbClr val="1B2A24"/>
           </a:solidFill>
           <a:ln>
             <a:noFill/>
@@ -12912,7 +13016,7 @@
             <a:r>
               <a:rPr sz="2600" b="0">
                 <a:solidFill>
-                  <a:srgbClr val="0F2B23"/>
+                  <a:srgbClr val="F5F1E6"/>
                 </a:solidFill>
                 <a:latin typeface="Dela Gothic One"/>
                 <a:ea typeface="Dela Gothic One"/>
@@ -12938,7 +13042,7 @@
             <a:avLst/>
           </a:prstGeom>
           <a:solidFill>
-            <a:srgbClr val="163A2F"/>
+            <a:srgbClr val="E3ECE5"/>
           </a:solidFill>
           <a:ln>
             <a:noFill/>
@@ -13000,7 +13104,7 @@
             <a:r>
               <a:rPr sz="1080" b="0">
                 <a:solidFill>
-                  <a:srgbClr val="F3EEE1"/>
+                  <a:srgbClr val="1B2A24"/>
                 </a:solidFill>
                 <a:latin typeface="Zen Kaku Gothic New"/>
                 <a:ea typeface="Zen Kaku Gothic New"/>
@@ -13011,7 +13115,7 @@
             <a:r>
               <a:rPr sz="1800" b="0">
                 <a:solidFill>
-                  <a:srgbClr val="F3EEE1"/>
+                  <a:srgbClr val="1B2A24"/>
                 </a:solidFill>
                 <a:latin typeface="Zen Kaku Gothic New"/>
                 <a:ea typeface="Zen Kaku Gothic New"/>
@@ -13032,7 +13136,7 @@
             <a:r>
               <a:rPr sz="1080" b="0">
                 <a:solidFill>
-                  <a:srgbClr val="F3EEE1"/>
+                  <a:srgbClr val="1B2A24"/>
                 </a:solidFill>
                 <a:latin typeface="Zen Kaku Gothic New"/>
                 <a:ea typeface="Zen Kaku Gothic New"/>
@@ -13043,7 +13147,7 @@
             <a:r>
               <a:rPr sz="1800" b="0">
                 <a:solidFill>
-                  <a:srgbClr val="F3EEE1"/>
+                  <a:srgbClr val="1B2A24"/>
                 </a:solidFill>
                 <a:latin typeface="Zen Kaku Gothic New"/>
                 <a:ea typeface="Zen Kaku Gothic New"/>
@@ -13087,7 +13191,7 @@
             <a:r>
               <a:rPr sz="1500" b="1">
                 <a:solidFill>
-                  <a:srgbClr val="F3EEE1"/>
+                  <a:srgbClr val="1B2A24"/>
                 </a:solidFill>
                 <a:latin typeface="Zen Kaku Gothic New"/>
                 <a:ea typeface="Zen Kaku Gothic New"/>
@@ -13108,7 +13212,7 @@
             <a:r>
               <a:rPr sz="1500" b="0">
                 <a:solidFill>
-                  <a:srgbClr val="A7BCB1"/>
+                  <a:srgbClr val="4E5F57"/>
                 </a:solidFill>
                 <a:latin typeface="Zen Kaku Gothic New"/>
                 <a:ea typeface="Zen Kaku Gothic New"/>
@@ -13152,7 +13256,7 @@
             <a:r>
               <a:rPr sz="1100" b="0">
                 <a:solidFill>
-                  <a:srgbClr val="A7BCB1"/>
+                  <a:srgbClr val="4E5F57"/>
                 </a:solidFill>
                 <a:latin typeface="Zen Kaku Gothic New"/>
                 <a:ea typeface="Zen Kaku Gothic New"/>
@@ -13163,7 +13267,7 @@
             <a:r>
               <a:rPr sz="1100" b="1">
                 <a:solidFill>
-                  <a:srgbClr val="A7BCB1"/>
+                  <a:srgbClr val="4E5F57"/>
                 </a:solidFill>
                 <a:latin typeface="Zen Kaku Gothic New"/>
                 <a:ea typeface="Zen Kaku Gothic New"/>
@@ -13188,7 +13292,7 @@
     <p:bg>
       <p:bgPr>
         <a:solidFill>
-          <a:srgbClr val="0F2B23"/>
+          <a:srgbClr val="F5F1E6"/>
         </a:solidFill>
         <a:effectLst/>
       </p:bgPr>
@@ -13233,7 +13337,7 @@
             <a:r>
               <a:rPr sz="1800" b="1">
                 <a:solidFill>
-                  <a:srgbClr val="A7BCB1"/>
+                  <a:srgbClr val="4E5F57"/>
                 </a:solidFill>
                 <a:latin typeface="Zen Kaku Gothic New"/>
                 <a:ea typeface="Zen Kaku Gothic New"/>
@@ -13244,7 +13348,7 @@
             <a:r>
               <a:rPr sz="4400" b="0">
                 <a:solidFill>
-                  <a:srgbClr val="EE5A3C"/>
+                  <a:srgbClr val="C23B1E"/>
                 </a:solidFill>
                 <a:latin typeface="Dela Gothic One"/>
                 <a:ea typeface="Dela Gothic One"/>
@@ -13288,7 +13392,7 @@
             <a:r>
               <a:rPr sz="1600" b="1">
                 <a:solidFill>
-                  <a:srgbClr val="A7BCB1"/>
+                  <a:srgbClr val="4E5F57"/>
                 </a:solidFill>
                 <a:latin typeface="Zen Kaku Gothic New"/>
                 <a:ea typeface="Zen Kaku Gothic New"/>
@@ -13316,11 +13420,11 @@
             </a:avLst>
           </a:prstGeom>
           <a:solidFill>
-            <a:srgbClr val="F6F1E4"/>
+            <a:srgbClr val="FFFFFF"/>
           </a:solidFill>
           <a:ln w="12700">
             <a:solidFill>
-              <a:srgbClr val="C9BFA6"/>
+              <a:srgbClr val="B8AE94"/>
             </a:solidFill>
           </a:ln>
           <a:effectLst/>
@@ -13452,11 +13556,11 @@
             </a:avLst>
           </a:prstGeom>
           <a:solidFill>
-            <a:srgbClr val="F6F1E4"/>
+            <a:srgbClr val="FFFFFF"/>
           </a:solidFill>
           <a:ln w="12700">
             <a:solidFill>
-              <a:srgbClr val="C9BFA6"/>
+              <a:srgbClr val="B8AE94"/>
             </a:solidFill>
           </a:ln>
           <a:effectLst/>
@@ -13588,11 +13692,11 @@
             </a:avLst>
           </a:prstGeom>
           <a:solidFill>
-            <a:srgbClr val="F6F1E4"/>
+            <a:srgbClr val="FFFFFF"/>
           </a:solidFill>
           <a:ln w="12700">
             <a:solidFill>
-              <a:srgbClr val="C9BFA6"/>
+              <a:srgbClr val="B8AE94"/>
             </a:solidFill>
           </a:ln>
           <a:effectLst/>
@@ -13696,7 +13800,7 @@
             <a:r>
               <a:rPr sz="2600" b="0">
                 <a:solidFill>
-                  <a:srgbClr val="EE5A3C"/>
+                  <a:srgbClr val="C23B1E"/>
                 </a:solidFill>
                 <a:latin typeface="Dela Gothic One"/>
                 <a:ea typeface="Dela Gothic One"/>
@@ -13724,11 +13828,11 @@
             </a:avLst>
           </a:prstGeom>
           <a:solidFill>
-            <a:srgbClr val="F6F1E4"/>
+            <a:srgbClr val="FFFFFF"/>
           </a:solidFill>
           <a:ln w="12700">
             <a:solidFill>
-              <a:srgbClr val="C9BFA6"/>
+              <a:srgbClr val="B8AE94"/>
             </a:solidFill>
           </a:ln>
           <a:effectLst/>
@@ -13832,7 +13936,7 @@
             <a:r>
               <a:rPr sz="2600" b="0">
                 <a:solidFill>
-                  <a:srgbClr val="EE5A3C"/>
+                  <a:srgbClr val="C23B1E"/>
                 </a:solidFill>
                 <a:latin typeface="Dela Gothic One"/>
                 <a:ea typeface="Dela Gothic One"/>
@@ -13860,11 +13964,11 @@
             </a:avLst>
           </a:prstGeom>
           <a:solidFill>
-            <a:srgbClr val="F6F1E4"/>
+            <a:srgbClr val="FFFFFF"/>
           </a:solidFill>
           <a:ln w="12700">
             <a:solidFill>
-              <a:srgbClr val="C9BFA6"/>
+              <a:srgbClr val="B8AE94"/>
             </a:solidFill>
           </a:ln>
           <a:effectLst/>
@@ -13968,7 +14072,7 @@
             <a:r>
               <a:rPr sz="2600" b="0">
                 <a:solidFill>
-                  <a:srgbClr val="EE5A3C"/>
+                  <a:srgbClr val="C23B1E"/>
                 </a:solidFill>
                 <a:latin typeface="Dela Gothic One"/>
                 <a:ea typeface="Dela Gothic One"/>
@@ -13996,11 +14100,11 @@
             </a:avLst>
           </a:prstGeom>
           <a:solidFill>
-            <a:srgbClr val="F6F1E4"/>
+            <a:srgbClr val="FFFFFF"/>
           </a:solidFill>
           <a:ln w="12700">
             <a:solidFill>
-              <a:srgbClr val="C9BFA6"/>
+              <a:srgbClr val="B8AE94"/>
             </a:solidFill>
           </a:ln>
           <a:effectLst/>
@@ -14132,11 +14236,11 @@
             </a:avLst>
           </a:prstGeom>
           <a:solidFill>
-            <a:srgbClr val="F6F1E4"/>
+            <a:srgbClr val="FFFFFF"/>
           </a:solidFill>
           <a:ln w="12700">
             <a:solidFill>
-              <a:srgbClr val="C9BFA6"/>
+              <a:srgbClr val="B8AE94"/>
             </a:solidFill>
           </a:ln>
           <a:effectLst/>
@@ -14268,11 +14372,11 @@
             </a:avLst>
           </a:prstGeom>
           <a:solidFill>
-            <a:srgbClr val="F6F1E4"/>
+            <a:srgbClr val="FFFFFF"/>
           </a:solidFill>
           <a:ln w="12700">
             <a:solidFill>
-              <a:srgbClr val="C9BFA6"/>
+              <a:srgbClr val="B8AE94"/>
             </a:solidFill>
           </a:ln>
           <a:effectLst/>
@@ -14404,11 +14508,11 @@
             </a:avLst>
           </a:prstGeom>
           <a:solidFill>
-            <a:srgbClr val="F6F1E4"/>
+            <a:srgbClr val="FFFFFF"/>
           </a:solidFill>
           <a:ln w="12700">
             <a:solidFill>
-              <a:srgbClr val="C9BFA6"/>
+              <a:srgbClr val="B8AE94"/>
             </a:solidFill>
           </a:ln>
           <a:effectLst/>
@@ -14540,11 +14644,11 @@
             </a:avLst>
           </a:prstGeom>
           <a:solidFill>
-            <a:srgbClr val="F6F1E4"/>
+            <a:srgbClr val="FFFFFF"/>
           </a:solidFill>
           <a:ln w="12700">
             <a:solidFill>
-              <a:srgbClr val="C9BFA6"/>
+              <a:srgbClr val="B8AE94"/>
             </a:solidFill>
           </a:ln>
           <a:effectLst/>
@@ -14676,11 +14780,11 @@
             </a:avLst>
           </a:prstGeom>
           <a:solidFill>
-            <a:srgbClr val="F6F1E4"/>
+            <a:srgbClr val="FFFFFF"/>
           </a:solidFill>
           <a:ln w="12700">
             <a:solidFill>
-              <a:srgbClr val="C9BFA6"/>
+              <a:srgbClr val="B8AE94"/>
             </a:solidFill>
           </a:ln>
           <a:effectLst/>
@@ -14812,11 +14916,11 @@
             </a:avLst>
           </a:prstGeom>
           <a:solidFill>
-            <a:srgbClr val="F6F1E4"/>
+            <a:srgbClr val="FFFFFF"/>
           </a:solidFill>
           <a:ln w="12700">
             <a:solidFill>
-              <a:srgbClr val="C9BFA6"/>
+              <a:srgbClr val="B8AE94"/>
             </a:solidFill>
           </a:ln>
           <a:effectLst/>
@@ -14948,11 +15052,11 @@
             </a:avLst>
           </a:prstGeom>
           <a:solidFill>
-            <a:srgbClr val="F6F1E4"/>
+            <a:srgbClr val="FFFFFF"/>
           </a:solidFill>
           <a:ln w="12700">
             <a:solidFill>
-              <a:srgbClr val="C9BFA6"/>
+              <a:srgbClr val="B8AE94"/>
             </a:solidFill>
           </a:ln>
           <a:effectLst/>
@@ -15100,7 +15204,7 @@
             <a:r>
               <a:rPr sz="1800" b="0">
                 <a:solidFill>
-                  <a:srgbClr val="F3EEE1"/>
+                  <a:srgbClr val="1B2A24"/>
                 </a:solidFill>
                 <a:latin typeface="Zen Kaku Gothic New"/>
                 <a:ea typeface="Zen Kaku Gothic New"/>
@@ -15111,7 +15215,7 @@
             <a:r>
               <a:rPr sz="1800" b="1">
                 <a:solidFill>
-                  <a:srgbClr val="EE5A3C"/>
+                  <a:srgbClr val="C23B1E"/>
                 </a:solidFill>
                 <a:latin typeface="Zen Kaku Gothic New"/>
                 <a:ea typeface="Zen Kaku Gothic New"/>
@@ -15122,7 +15226,7 @@
             <a:r>
               <a:rPr sz="1800" b="0">
                 <a:solidFill>
-                  <a:srgbClr val="F3EEE1"/>
+                  <a:srgbClr val="1B2A24"/>
                 </a:solidFill>
                 <a:latin typeface="Zen Kaku Gothic New"/>
                 <a:ea typeface="Zen Kaku Gothic New"/>
@@ -15166,7 +15270,7 @@
             <a:r>
               <a:rPr sz="1019" b="0">
                 <a:solidFill>
-                  <a:srgbClr val="EE5A3C"/>
+                  <a:srgbClr val="C23B1E"/>
                 </a:solidFill>
                 <a:latin typeface="Zen Kaku Gothic New"/>
                 <a:ea typeface="Zen Kaku Gothic New"/>
@@ -15177,7 +15281,7 @@
             <a:r>
               <a:rPr sz="1700" b="0">
                 <a:solidFill>
-                  <a:srgbClr val="F3EEE1"/>
+                  <a:srgbClr val="1B2A24"/>
                 </a:solidFill>
                 <a:latin typeface="Zen Kaku Gothic New"/>
                 <a:ea typeface="Zen Kaku Gothic New"/>
@@ -15188,7 +15292,7 @@
             <a:r>
               <a:rPr sz="1700" b="1">
                 <a:solidFill>
-                  <a:srgbClr val="F3EEE1"/>
+                  <a:srgbClr val="1B2A24"/>
                 </a:solidFill>
                 <a:latin typeface="Zen Kaku Gothic New"/>
                 <a:ea typeface="Zen Kaku Gothic New"/>
@@ -15209,7 +15313,7 @@
             <a:r>
               <a:rPr sz="1019" b="0">
                 <a:solidFill>
-                  <a:srgbClr val="EE5A3C"/>
+                  <a:srgbClr val="C23B1E"/>
                 </a:solidFill>
                 <a:latin typeface="Zen Kaku Gothic New"/>
                 <a:ea typeface="Zen Kaku Gothic New"/>
@@ -15220,7 +15324,7 @@
             <a:r>
               <a:rPr sz="1700" b="0">
                 <a:solidFill>
-                  <a:srgbClr val="F3EEE1"/>
+                  <a:srgbClr val="1B2A24"/>
                 </a:solidFill>
                 <a:latin typeface="Zen Kaku Gothic New"/>
                 <a:ea typeface="Zen Kaku Gothic New"/>
@@ -15231,7 +15335,7 @@
             <a:r>
               <a:rPr sz="1700" b="1">
                 <a:solidFill>
-                  <a:srgbClr val="F3EEE1"/>
+                  <a:srgbClr val="1B2A24"/>
                 </a:solidFill>
                 <a:latin typeface="Zen Kaku Gothic New"/>
                 <a:ea typeface="Zen Kaku Gothic New"/>
@@ -15242,7 +15346,7 @@
             <a:r>
               <a:rPr sz="1700" b="0">
                 <a:solidFill>
-                  <a:srgbClr val="F3EEE1"/>
+                  <a:srgbClr val="1B2A24"/>
                 </a:solidFill>
                 <a:latin typeface="Zen Kaku Gothic New"/>
                 <a:ea typeface="Zen Kaku Gothic New"/>
@@ -15263,7 +15367,7 @@
             <a:r>
               <a:rPr sz="1019" b="0">
                 <a:solidFill>
-                  <a:srgbClr val="EE5A3C"/>
+                  <a:srgbClr val="C23B1E"/>
                 </a:solidFill>
                 <a:latin typeface="Zen Kaku Gothic New"/>
                 <a:ea typeface="Zen Kaku Gothic New"/>
@@ -15274,7 +15378,7 @@
             <a:r>
               <a:rPr sz="1700" b="0">
                 <a:solidFill>
-                  <a:srgbClr val="F3EEE1"/>
+                  <a:srgbClr val="1B2A24"/>
                 </a:solidFill>
                 <a:latin typeface="Zen Kaku Gothic New"/>
                 <a:ea typeface="Zen Kaku Gothic New"/>
@@ -15295,7 +15399,7 @@
             <a:r>
               <a:rPr sz="1019" b="0">
                 <a:solidFill>
-                  <a:srgbClr val="EE5A3C"/>
+                  <a:srgbClr val="C23B1E"/>
                 </a:solidFill>
                 <a:latin typeface="Zen Kaku Gothic New"/>
                 <a:ea typeface="Zen Kaku Gothic New"/>
@@ -15306,7 +15410,7 @@
             <a:r>
               <a:rPr sz="1700" b="0">
                 <a:solidFill>
-                  <a:srgbClr val="F3EEE1"/>
+                  <a:srgbClr val="1B2A24"/>
                 </a:solidFill>
                 <a:latin typeface="Zen Kaku Gothic New"/>
                 <a:ea typeface="Zen Kaku Gothic New"/>
@@ -15350,7 +15454,7 @@
             <a:r>
               <a:rPr sz="1100" b="0">
                 <a:solidFill>
-                  <a:srgbClr val="A7BCB1"/>
+                  <a:srgbClr val="4E5F57"/>
                 </a:solidFill>
                 <a:latin typeface="Zen Kaku Gothic New"/>
                 <a:ea typeface="Zen Kaku Gothic New"/>
@@ -15361,7 +15465,7 @@
             <a:r>
               <a:rPr sz="1100" b="1">
                 <a:solidFill>
-                  <a:srgbClr val="A7BCB1"/>
+                  <a:srgbClr val="4E5F57"/>
                 </a:solidFill>
                 <a:latin typeface="Zen Kaku Gothic New"/>
                 <a:ea typeface="Zen Kaku Gothic New"/>
